--- a/Unit3_Cloud_Platforms_Tools.pptx
+++ b/Unit3_Cloud_Platforms_Tools.pptx
@@ -2,8 +2,11 @@
 <file path=ppt/presentation.xml><?xml version="1.0" encoding="utf-8"?>
 <p:presentation xmlns:a="http://schemas.openxmlformats.org/drawingml/2006/main" xmlns:r="http://schemas.openxmlformats.org/officeDocument/2006/relationships" xmlns:p="http://schemas.openxmlformats.org/presentationml/2006/main" saveSubsetFonts="1" autoCompressPictures="0">
   <p:sldMasterIdLst>
-    <p:sldMasterId id="2147483648" r:id="rId1"/>
+    <p:sldMasterId id="2147483660" r:id="rId1"/>
   </p:sldMasterIdLst>
+  <p:notesMasterIdLst>
+    <p:notesMasterId r:id="rId25"/>
+  </p:notesMasterIdLst>
   <p:sldIdLst>
     <p:sldId id="256" r:id="rId2"/>
     <p:sldId id="257" r:id="rId3"/>
@@ -21,13 +24,13 @@
     <p:sldId id="269" r:id="rId15"/>
     <p:sldId id="270" r:id="rId16"/>
     <p:sldId id="271" r:id="rId17"/>
-    <p:sldId id="272" r:id="rId18"/>
-    <p:sldId id="273" r:id="rId19"/>
-    <p:sldId id="274" r:id="rId20"/>
-    <p:sldId id="275" r:id="rId21"/>
-    <p:sldId id="276" r:id="rId22"/>
-    <p:sldId id="277" r:id="rId23"/>
-    <p:sldId id="278" r:id="rId24"/>
+    <p:sldId id="279" r:id="rId18"/>
+    <p:sldId id="272" r:id="rId19"/>
+    <p:sldId id="273" r:id="rId20"/>
+    <p:sldId id="274" r:id="rId21"/>
+    <p:sldId id="275" r:id="rId22"/>
+    <p:sldId id="276" r:id="rId23"/>
+    <p:sldId id="277" r:id="rId24"/>
   </p:sldIdLst>
   <p:sldSz cx="9144000" cy="6858000" type="screen4x3"/>
   <p:notesSz cx="6858000" cy="9144000"/>
@@ -145,8 +148,647 @@
 </p:presentation>
 </file>
 
+<file path=ppt/notesMasters/notesMaster1.xml><?xml version="1.0" encoding="utf-8"?>
+<p:notesMaster xmlns:a="http://schemas.openxmlformats.org/drawingml/2006/main" xmlns:r="http://schemas.openxmlformats.org/officeDocument/2006/relationships" xmlns:p="http://schemas.openxmlformats.org/presentationml/2006/main">
+  <p:cSld>
+    <p:bg>
+      <p:bgRef idx="1001">
+        <a:schemeClr val="bg1"/>
+      </p:bgRef>
+    </p:bg>
+    <p:spTree>
+      <p:nvGrpSpPr>
+        <p:cNvPr id="1" name=""/>
+        <p:cNvGrpSpPr/>
+        <p:nvPr/>
+      </p:nvGrpSpPr>
+      <p:grpSpPr>
+        <a:xfrm>
+          <a:off x="0" y="0"/>
+          <a:ext cx="0" cy="0"/>
+          <a:chOff x="0" y="0"/>
+          <a:chExt cx="0" cy="0"/>
+        </a:xfrm>
+      </p:grpSpPr>
+      <p:sp>
+        <p:nvSpPr>
+          <p:cNvPr id="2" name="Header Placeholder 1"/>
+          <p:cNvSpPr>
+            <a:spLocks noGrp="1"/>
+          </p:cNvSpPr>
+          <p:nvPr>
+            <p:ph type="hdr" sz="quarter"/>
+          </p:nvPr>
+        </p:nvSpPr>
+        <p:spPr>
+          <a:xfrm>
+            <a:off x="0" y="0"/>
+            <a:ext cx="2971800" cy="458788"/>
+          </a:xfrm>
+          <a:prstGeom prst="rect">
+            <a:avLst/>
+          </a:prstGeom>
+        </p:spPr>
+        <p:txBody>
+          <a:bodyPr vert="horz" lIns="91440" tIns="45720" rIns="91440" bIns="45720" rtlCol="0"/>
+          <a:lstStyle>
+            <a:lvl1pPr algn="l">
+              <a:defRPr sz="1200"/>
+            </a:lvl1pPr>
+          </a:lstStyle>
+          <a:p>
+            <a:endParaRPr lang="en-US"/>
+          </a:p>
+        </p:txBody>
+      </p:sp>
+      <p:sp>
+        <p:nvSpPr>
+          <p:cNvPr id="3" name="Date Placeholder 2"/>
+          <p:cNvSpPr>
+            <a:spLocks noGrp="1"/>
+          </p:cNvSpPr>
+          <p:nvPr>
+            <p:ph type="dt" idx="1"/>
+          </p:nvPr>
+        </p:nvSpPr>
+        <p:spPr>
+          <a:xfrm>
+            <a:off x="3884613" y="0"/>
+            <a:ext cx="2971800" cy="458788"/>
+          </a:xfrm>
+          <a:prstGeom prst="rect">
+            <a:avLst/>
+          </a:prstGeom>
+        </p:spPr>
+        <p:txBody>
+          <a:bodyPr vert="horz" lIns="91440" tIns="45720" rIns="91440" bIns="45720" rtlCol="0"/>
+          <a:lstStyle>
+            <a:lvl1pPr algn="r">
+              <a:defRPr sz="1200"/>
+            </a:lvl1pPr>
+          </a:lstStyle>
+          <a:p>
+            <a:fld id="{1F29A21F-6479-4FA9-86E3-877BD48C04E3}" type="datetimeFigureOut">
+              <a:rPr lang="en-US" smtClean="0"/>
+              <a:t>12/18/2025</a:t>
+            </a:fld>
+            <a:endParaRPr lang="en-US"/>
+          </a:p>
+        </p:txBody>
+      </p:sp>
+      <p:sp>
+        <p:nvSpPr>
+          <p:cNvPr id="4" name="Slide Image Placeholder 3"/>
+          <p:cNvSpPr>
+            <a:spLocks noGrp="1" noRot="1" noChangeAspect="1"/>
+          </p:cNvSpPr>
+          <p:nvPr>
+            <p:ph type="sldImg" idx="2"/>
+          </p:nvPr>
+        </p:nvSpPr>
+        <p:spPr>
+          <a:xfrm>
+            <a:off x="1371600" y="1143000"/>
+            <a:ext cx="4114800" cy="3086100"/>
+          </a:xfrm>
+          <a:prstGeom prst="rect">
+            <a:avLst/>
+          </a:prstGeom>
+          <a:noFill/>
+          <a:ln w="12700">
+            <a:solidFill>
+              <a:prstClr val="black"/>
+            </a:solidFill>
+          </a:ln>
+        </p:spPr>
+        <p:txBody>
+          <a:bodyPr vert="horz" lIns="91440" tIns="45720" rIns="91440" bIns="45720" rtlCol="0" anchor="ctr"/>
+          <a:lstStyle/>
+          <a:p>
+            <a:endParaRPr lang="en-US"/>
+          </a:p>
+        </p:txBody>
+      </p:sp>
+      <p:sp>
+        <p:nvSpPr>
+          <p:cNvPr id="5" name="Notes Placeholder 4"/>
+          <p:cNvSpPr>
+            <a:spLocks noGrp="1"/>
+          </p:cNvSpPr>
+          <p:nvPr>
+            <p:ph type="body" sz="quarter" idx="3"/>
+          </p:nvPr>
+        </p:nvSpPr>
+        <p:spPr>
+          <a:xfrm>
+            <a:off x="685800" y="4400550"/>
+            <a:ext cx="5486400" cy="3600450"/>
+          </a:xfrm>
+          <a:prstGeom prst="rect">
+            <a:avLst/>
+          </a:prstGeom>
+        </p:spPr>
+        <p:txBody>
+          <a:bodyPr vert="horz" lIns="91440" tIns="45720" rIns="91440" bIns="45720" rtlCol="0"/>
+          <a:lstStyle/>
+          <a:p>
+            <a:pPr lvl="0"/>
+            <a:r>
+              <a:rPr lang="en-US"/>
+              <a:t>Click to edit Master text styles</a:t>
+            </a:r>
+          </a:p>
+          <a:p>
+            <a:pPr lvl="1"/>
+            <a:r>
+              <a:rPr lang="en-US"/>
+              <a:t>Second level</a:t>
+            </a:r>
+          </a:p>
+          <a:p>
+            <a:pPr lvl="2"/>
+            <a:r>
+              <a:rPr lang="en-US"/>
+              <a:t>Third level</a:t>
+            </a:r>
+          </a:p>
+          <a:p>
+            <a:pPr lvl="3"/>
+            <a:r>
+              <a:rPr lang="en-US"/>
+              <a:t>Fourth level</a:t>
+            </a:r>
+          </a:p>
+          <a:p>
+            <a:pPr lvl="4"/>
+            <a:r>
+              <a:rPr lang="en-US"/>
+              <a:t>Fifth level</a:t>
+            </a:r>
+          </a:p>
+        </p:txBody>
+      </p:sp>
+      <p:sp>
+        <p:nvSpPr>
+          <p:cNvPr id="6" name="Footer Placeholder 5"/>
+          <p:cNvSpPr>
+            <a:spLocks noGrp="1"/>
+          </p:cNvSpPr>
+          <p:nvPr>
+            <p:ph type="ftr" sz="quarter" idx="4"/>
+          </p:nvPr>
+        </p:nvSpPr>
+        <p:spPr>
+          <a:xfrm>
+            <a:off x="0" y="8685213"/>
+            <a:ext cx="2971800" cy="458787"/>
+          </a:xfrm>
+          <a:prstGeom prst="rect">
+            <a:avLst/>
+          </a:prstGeom>
+        </p:spPr>
+        <p:txBody>
+          <a:bodyPr vert="horz" lIns="91440" tIns="45720" rIns="91440" bIns="45720" rtlCol="0" anchor="b"/>
+          <a:lstStyle>
+            <a:lvl1pPr algn="l">
+              <a:defRPr sz="1200"/>
+            </a:lvl1pPr>
+          </a:lstStyle>
+          <a:p>
+            <a:endParaRPr lang="en-US"/>
+          </a:p>
+        </p:txBody>
+      </p:sp>
+      <p:sp>
+        <p:nvSpPr>
+          <p:cNvPr id="7" name="Slide Number Placeholder 6"/>
+          <p:cNvSpPr>
+            <a:spLocks noGrp="1"/>
+          </p:cNvSpPr>
+          <p:nvPr>
+            <p:ph type="sldNum" sz="quarter" idx="5"/>
+          </p:nvPr>
+        </p:nvSpPr>
+        <p:spPr>
+          <a:xfrm>
+            <a:off x="3884613" y="8685213"/>
+            <a:ext cx="2971800" cy="458787"/>
+          </a:xfrm>
+          <a:prstGeom prst="rect">
+            <a:avLst/>
+          </a:prstGeom>
+        </p:spPr>
+        <p:txBody>
+          <a:bodyPr vert="horz" lIns="91440" tIns="45720" rIns="91440" bIns="45720" rtlCol="0" anchor="b"/>
+          <a:lstStyle>
+            <a:lvl1pPr algn="r">
+              <a:defRPr sz="1200"/>
+            </a:lvl1pPr>
+          </a:lstStyle>
+          <a:p>
+            <a:fld id="{769C8C3A-C329-410D-A6BB-A0C889CE1979}" type="slidenum">
+              <a:rPr lang="en-US" smtClean="0"/>
+              <a:t>‹#›</a:t>
+            </a:fld>
+            <a:endParaRPr lang="en-US"/>
+          </a:p>
+        </p:txBody>
+      </p:sp>
+    </p:spTree>
+    <p:extLst>
+      <p:ext uri="{BB962C8B-B14F-4D97-AF65-F5344CB8AC3E}">
+        <p14:creationId xmlns:p14="http://schemas.microsoft.com/office/powerpoint/2010/main" val="211823047"/>
+      </p:ext>
+    </p:extLst>
+  </p:cSld>
+  <p:clrMap bg1="lt1" tx1="dk1" bg2="lt2" tx2="dk2" accent1="accent1" accent2="accent2" accent3="accent3" accent4="accent4" accent5="accent5" accent6="accent6" hlink="hlink" folHlink="folHlink"/>
+  <p:notesStyle>
+    <a:lvl1pPr marL="0" algn="l" defTabSz="914400" rtl="0" eaLnBrk="1" latinLnBrk="0" hangingPunct="1">
+      <a:defRPr sz="1200" kern="1200">
+        <a:solidFill>
+          <a:schemeClr val="tx1"/>
+        </a:solidFill>
+        <a:latin typeface="+mn-lt"/>
+        <a:ea typeface="+mn-ea"/>
+        <a:cs typeface="+mn-cs"/>
+      </a:defRPr>
+    </a:lvl1pPr>
+    <a:lvl2pPr marL="457200" algn="l" defTabSz="914400" rtl="0" eaLnBrk="1" latinLnBrk="0" hangingPunct="1">
+      <a:defRPr sz="1200" kern="1200">
+        <a:solidFill>
+          <a:schemeClr val="tx1"/>
+        </a:solidFill>
+        <a:latin typeface="+mn-lt"/>
+        <a:ea typeface="+mn-ea"/>
+        <a:cs typeface="+mn-cs"/>
+      </a:defRPr>
+    </a:lvl2pPr>
+    <a:lvl3pPr marL="914400" algn="l" defTabSz="914400" rtl="0" eaLnBrk="1" latinLnBrk="0" hangingPunct="1">
+      <a:defRPr sz="1200" kern="1200">
+        <a:solidFill>
+          <a:schemeClr val="tx1"/>
+        </a:solidFill>
+        <a:latin typeface="+mn-lt"/>
+        <a:ea typeface="+mn-ea"/>
+        <a:cs typeface="+mn-cs"/>
+      </a:defRPr>
+    </a:lvl3pPr>
+    <a:lvl4pPr marL="1371600" algn="l" defTabSz="914400" rtl="0" eaLnBrk="1" latinLnBrk="0" hangingPunct="1">
+      <a:defRPr sz="1200" kern="1200">
+        <a:solidFill>
+          <a:schemeClr val="tx1"/>
+        </a:solidFill>
+        <a:latin typeface="+mn-lt"/>
+        <a:ea typeface="+mn-ea"/>
+        <a:cs typeface="+mn-cs"/>
+      </a:defRPr>
+    </a:lvl4pPr>
+    <a:lvl5pPr marL="1828800" algn="l" defTabSz="914400" rtl="0" eaLnBrk="1" latinLnBrk="0" hangingPunct="1">
+      <a:defRPr sz="1200" kern="1200">
+        <a:solidFill>
+          <a:schemeClr val="tx1"/>
+        </a:solidFill>
+        <a:latin typeface="+mn-lt"/>
+        <a:ea typeface="+mn-ea"/>
+        <a:cs typeface="+mn-cs"/>
+      </a:defRPr>
+    </a:lvl5pPr>
+    <a:lvl6pPr marL="2286000" algn="l" defTabSz="914400" rtl="0" eaLnBrk="1" latinLnBrk="0" hangingPunct="1">
+      <a:defRPr sz="1200" kern="1200">
+        <a:solidFill>
+          <a:schemeClr val="tx1"/>
+        </a:solidFill>
+        <a:latin typeface="+mn-lt"/>
+        <a:ea typeface="+mn-ea"/>
+        <a:cs typeface="+mn-cs"/>
+      </a:defRPr>
+    </a:lvl6pPr>
+    <a:lvl7pPr marL="2743200" algn="l" defTabSz="914400" rtl="0" eaLnBrk="1" latinLnBrk="0" hangingPunct="1">
+      <a:defRPr sz="1200" kern="1200">
+        <a:solidFill>
+          <a:schemeClr val="tx1"/>
+        </a:solidFill>
+        <a:latin typeface="+mn-lt"/>
+        <a:ea typeface="+mn-ea"/>
+        <a:cs typeface="+mn-cs"/>
+      </a:defRPr>
+    </a:lvl7pPr>
+    <a:lvl8pPr marL="3200400" algn="l" defTabSz="914400" rtl="0" eaLnBrk="1" latinLnBrk="0" hangingPunct="1">
+      <a:defRPr sz="1200" kern="1200">
+        <a:solidFill>
+          <a:schemeClr val="tx1"/>
+        </a:solidFill>
+        <a:latin typeface="+mn-lt"/>
+        <a:ea typeface="+mn-ea"/>
+        <a:cs typeface="+mn-cs"/>
+      </a:defRPr>
+    </a:lvl8pPr>
+    <a:lvl9pPr marL="3657600" algn="l" defTabSz="914400" rtl="0" eaLnBrk="1" latinLnBrk="0" hangingPunct="1">
+      <a:defRPr sz="1200" kern="1200">
+        <a:solidFill>
+          <a:schemeClr val="tx1"/>
+        </a:solidFill>
+        <a:latin typeface="+mn-lt"/>
+        <a:ea typeface="+mn-ea"/>
+        <a:cs typeface="+mn-cs"/>
+      </a:defRPr>
+    </a:lvl9pPr>
+  </p:notesStyle>
+</p:notesMaster>
+</file>
+
+<file path=ppt/notesSlides/notesSlide1.xml><?xml version="1.0" encoding="utf-8"?>
+<p:notes xmlns:a="http://schemas.openxmlformats.org/drawingml/2006/main" xmlns:r="http://schemas.openxmlformats.org/officeDocument/2006/relationships" xmlns:p="http://schemas.openxmlformats.org/presentationml/2006/main">
+  <p:cSld>
+    <p:spTree>
+      <p:nvGrpSpPr>
+        <p:cNvPr id="1" name=""/>
+        <p:cNvGrpSpPr/>
+        <p:nvPr/>
+      </p:nvGrpSpPr>
+      <p:grpSpPr>
+        <a:xfrm>
+          <a:off x="0" y="0"/>
+          <a:ext cx="0" cy="0"/>
+          <a:chOff x="0" y="0"/>
+          <a:chExt cx="0" cy="0"/>
+        </a:xfrm>
+      </p:grpSpPr>
+      <p:sp>
+        <p:nvSpPr>
+          <p:cNvPr id="2" name="Slide Image Placeholder 1"/>
+          <p:cNvSpPr>
+            <a:spLocks noGrp="1" noRot="1" noChangeAspect="1"/>
+          </p:cNvSpPr>
+          <p:nvPr>
+            <p:ph type="sldImg"/>
+          </p:nvPr>
+        </p:nvSpPr>
+        <p:spPr/>
+      </p:sp>
+      <p:sp>
+        <p:nvSpPr>
+          <p:cNvPr id="3" name="Notes Placeholder 2"/>
+          <p:cNvSpPr>
+            <a:spLocks noGrp="1"/>
+          </p:cNvSpPr>
+          <p:nvPr>
+            <p:ph type="body" idx="1"/>
+          </p:nvPr>
+        </p:nvSpPr>
+        <p:spPr/>
+        <p:txBody>
+          <a:bodyPr/>
+          <a:lstStyle/>
+          <a:p>
+            <a:r>
+              <a:rPr lang="en-US" sz="1200" b="0" i="0" kern="1200" dirty="0">
+                <a:solidFill>
+                  <a:schemeClr val="tx1"/>
+                </a:solidFill>
+                <a:effectLst/>
+                <a:latin typeface="+mn-lt"/>
+                <a:ea typeface="+mn-ea"/>
+                <a:cs typeface="+mn-cs"/>
+              </a:rPr>
+              <a:t>S3, EBS, and EFS are </a:t>
+            </a:r>
+            <a:r>
+              <a:rPr lang="en-US" dirty="0"/>
+              <a:t>Amazon Web Services' core storage options</a:t>
+            </a:r>
+            <a:r>
+              <a:rPr lang="en-US" sz="1200" b="0" i="0" kern="1200" dirty="0">
+                <a:solidFill>
+                  <a:schemeClr val="tx1"/>
+                </a:solidFill>
+                <a:effectLst/>
+                <a:latin typeface="+mn-lt"/>
+                <a:ea typeface="+mn-ea"/>
+                <a:cs typeface="+mn-cs"/>
+              </a:rPr>
+              <a:t>, differing in data type (object, block, file), access (internet, single instance, shared), and use case (backups/web, databases/OS, shared files/apps). </a:t>
+            </a:r>
+            <a:r>
+              <a:rPr lang="en-US" sz="1200" b="1" i="0" kern="1200" dirty="0">
+                <a:solidFill>
+                  <a:schemeClr val="tx1"/>
+                </a:solidFill>
+                <a:effectLst/>
+                <a:latin typeface="+mn-lt"/>
+                <a:ea typeface="+mn-ea"/>
+                <a:cs typeface="+mn-cs"/>
+              </a:rPr>
+              <a:t>S3 (Simple Storage Service)</a:t>
+            </a:r>
+            <a:r>
+              <a:rPr lang="en-US" sz="1200" b="0" i="0" kern="1200" dirty="0">
+                <a:solidFill>
+                  <a:schemeClr val="tx1"/>
+                </a:solidFill>
+                <a:effectLst/>
+                <a:latin typeface="+mn-lt"/>
+                <a:ea typeface="+mn-ea"/>
+                <a:cs typeface="+mn-cs"/>
+              </a:rPr>
+              <a:t> is massive object storage for static content, backups, data lakes. </a:t>
+            </a:r>
+            <a:r>
+              <a:rPr lang="en-US" sz="1200" b="1" i="0" kern="1200" dirty="0">
+                <a:solidFill>
+                  <a:schemeClr val="tx1"/>
+                </a:solidFill>
+                <a:effectLst/>
+                <a:latin typeface="+mn-lt"/>
+                <a:ea typeface="+mn-ea"/>
+                <a:cs typeface="+mn-cs"/>
+              </a:rPr>
+              <a:t>EBS (Elastic Block Store)</a:t>
+            </a:r>
+            <a:r>
+              <a:rPr lang="en-US" sz="1200" b="0" i="0" kern="1200" dirty="0">
+                <a:solidFill>
+                  <a:schemeClr val="tx1"/>
+                </a:solidFill>
+                <a:effectLst/>
+                <a:latin typeface="+mn-lt"/>
+                <a:ea typeface="+mn-ea"/>
+                <a:cs typeface="+mn-cs"/>
+              </a:rPr>
+              <a:t> provides high-performance block storage, like a virtual hard drive, for single EC2 instances (databases, boot volumes). </a:t>
+            </a:r>
+            <a:r>
+              <a:rPr lang="en-US" sz="1200" b="1" i="0" kern="1200" dirty="0">
+                <a:solidFill>
+                  <a:schemeClr val="tx1"/>
+                </a:solidFill>
+                <a:effectLst/>
+                <a:latin typeface="+mn-lt"/>
+                <a:ea typeface="+mn-ea"/>
+                <a:cs typeface="+mn-cs"/>
+              </a:rPr>
+              <a:t>EFS (Elastic File System)</a:t>
+            </a:r>
+            <a:r>
+              <a:rPr lang="en-US" sz="1200" b="0" i="0" kern="1200" dirty="0">
+                <a:solidFill>
+                  <a:schemeClr val="tx1"/>
+                </a:solidFill>
+                <a:effectLst/>
+                <a:latin typeface="+mn-lt"/>
+                <a:ea typeface="+mn-ea"/>
+                <a:cs typeface="+mn-cs"/>
+              </a:rPr>
+              <a:t> offers scalable, shared file storage (NFS) for multiple Linux instances, ideal for content management or shared folders. </a:t>
+            </a:r>
+            <a:endParaRPr lang="en-US" dirty="0"/>
+          </a:p>
+        </p:txBody>
+      </p:sp>
+      <p:sp>
+        <p:nvSpPr>
+          <p:cNvPr id="4" name="Slide Number Placeholder 3"/>
+          <p:cNvSpPr>
+            <a:spLocks noGrp="1"/>
+          </p:cNvSpPr>
+          <p:nvPr>
+            <p:ph type="sldNum" sz="quarter" idx="5"/>
+          </p:nvPr>
+        </p:nvSpPr>
+        <p:spPr/>
+        <p:txBody>
+          <a:bodyPr/>
+          <a:lstStyle/>
+          <a:p>
+            <a:fld id="{769C8C3A-C329-410D-A6BB-A0C889CE1979}" type="slidenum">
+              <a:rPr lang="en-US" smtClean="0"/>
+              <a:t>15</a:t>
+            </a:fld>
+            <a:endParaRPr lang="en-US"/>
+          </a:p>
+        </p:txBody>
+      </p:sp>
+    </p:spTree>
+    <p:extLst>
+      <p:ext uri="{BB962C8B-B14F-4D97-AF65-F5344CB8AC3E}">
+        <p14:creationId xmlns:p14="http://schemas.microsoft.com/office/powerpoint/2010/main" val="4104229173"/>
+      </p:ext>
+    </p:extLst>
+  </p:cSld>
+  <p:clrMapOvr>
+    <a:masterClrMapping/>
+  </p:clrMapOvr>
+</p:notes>
+</file>
+
+<file path=ppt/notesSlides/notesSlide2.xml><?xml version="1.0" encoding="utf-8"?>
+<p:notes xmlns:a="http://schemas.openxmlformats.org/drawingml/2006/main" xmlns:r="http://schemas.openxmlformats.org/officeDocument/2006/relationships" xmlns:p="http://schemas.openxmlformats.org/presentationml/2006/main">
+  <p:cSld>
+    <p:spTree>
+      <p:nvGrpSpPr>
+        <p:cNvPr id="1" name=""/>
+        <p:cNvGrpSpPr/>
+        <p:nvPr/>
+      </p:nvGrpSpPr>
+      <p:grpSpPr>
+        <a:xfrm>
+          <a:off x="0" y="0"/>
+          <a:ext cx="0" cy="0"/>
+          <a:chOff x="0" y="0"/>
+          <a:chExt cx="0" cy="0"/>
+        </a:xfrm>
+      </p:grpSpPr>
+      <p:sp>
+        <p:nvSpPr>
+          <p:cNvPr id="2" name="Slide Image Placeholder 1"/>
+          <p:cNvSpPr>
+            <a:spLocks noGrp="1" noRot="1" noChangeAspect="1"/>
+          </p:cNvSpPr>
+          <p:nvPr>
+            <p:ph type="sldImg"/>
+          </p:nvPr>
+        </p:nvSpPr>
+        <p:spPr/>
+      </p:sp>
+      <p:sp>
+        <p:nvSpPr>
+          <p:cNvPr id="3" name="Notes Placeholder 2"/>
+          <p:cNvSpPr>
+            <a:spLocks noGrp="1"/>
+          </p:cNvSpPr>
+          <p:nvPr>
+            <p:ph type="body" idx="1"/>
+          </p:nvPr>
+        </p:nvSpPr>
+        <p:spPr/>
+        <p:txBody>
+          <a:bodyPr/>
+          <a:lstStyle/>
+          <a:p>
+            <a:r>
+              <a:rPr lang="en-US" dirty="0"/>
+              <a:t>Metadata in a data lake is stored in a centralized repository called a </a:t>
+            </a:r>
+            <a:r>
+              <a:rPr lang="en-US" b="1" dirty="0" err="1">
+                <a:effectLst/>
+                <a:hlinkClick r:id="rId3"/>
+              </a:rPr>
+              <a:t>metastore</a:t>
+            </a:r>
+            <a:r>
+              <a:rPr lang="en-US" dirty="0"/>
+              <a:t> (like AWS Glue Catalog or Hive </a:t>
+            </a:r>
+            <a:r>
+              <a:rPr lang="en-US" dirty="0" err="1"/>
+              <a:t>Metastore</a:t>
+            </a:r>
+            <a:r>
+              <a:rPr lang="en-US" dirty="0"/>
+              <a:t>) as structured data, acting as a "map" to find, understand, and govern the raw, often unstructured, data files in the lake, providing context (source, format, schema, lineage, quality) and enabling data discovery, security, and governance, preventing the lake from becoming a "data swamp"</a:t>
+            </a:r>
+          </a:p>
+        </p:txBody>
+      </p:sp>
+      <p:sp>
+        <p:nvSpPr>
+          <p:cNvPr id="4" name="Slide Number Placeholder 3"/>
+          <p:cNvSpPr>
+            <a:spLocks noGrp="1"/>
+          </p:cNvSpPr>
+          <p:nvPr>
+            <p:ph type="sldNum" sz="quarter" idx="5"/>
+          </p:nvPr>
+        </p:nvSpPr>
+        <p:spPr/>
+        <p:txBody>
+          <a:bodyPr/>
+          <a:lstStyle/>
+          <a:p>
+            <a:fld id="{769C8C3A-C329-410D-A6BB-A0C889CE1979}" type="slidenum">
+              <a:rPr lang="en-US" smtClean="0"/>
+              <a:t>17</a:t>
+            </a:fld>
+            <a:endParaRPr lang="en-US"/>
+          </a:p>
+        </p:txBody>
+      </p:sp>
+    </p:spTree>
+    <p:extLst>
+      <p:ext uri="{BB962C8B-B14F-4D97-AF65-F5344CB8AC3E}">
+        <p14:creationId xmlns:p14="http://schemas.microsoft.com/office/powerpoint/2010/main" val="731763229"/>
+      </p:ext>
+    </p:extLst>
+  </p:cSld>
+  <p:clrMapOvr>
+    <a:masterClrMapping/>
+  </p:clrMapOvr>
+</p:notes>
+</file>
+
 <file path=ppt/slideLayouts/slideLayout1.xml><?xml version="1.0" encoding="utf-8"?>
-<p:sldLayout xmlns:a="http://schemas.openxmlformats.org/drawingml/2006/main" xmlns:r="http://schemas.openxmlformats.org/officeDocument/2006/relationships" xmlns:p="http://schemas.openxmlformats.org/presentationml/2006/main" type="title" preserve="1">
+<p:sldLayout xmlns:a="http://schemas.openxmlformats.org/drawingml/2006/main" xmlns:r="http://schemas.openxmlformats.org/officeDocument/2006/relationships" xmlns:p="http://schemas.openxmlformats.org/presentationml/2006/main" showMasterSp="0" type="title" preserve="1">
   <p:cSld name="Title Slide">
     <p:spTree>
       <p:nvGrpSpPr>
@@ -164,139 +806,185 @@
       </p:grpSpPr>
       <p:sp>
         <p:nvSpPr>
-          <p:cNvPr id="2" name="Title 1"/>
-          <p:cNvSpPr>
-            <a:spLocks noGrp="1"/>
-          </p:cNvSpPr>
-          <p:nvPr>
-            <p:ph type="ctrTitle"/>
-          </p:nvPr>
+          <p:cNvPr id="7" name="Rectangle 6"/>
+          <p:cNvSpPr/>
+          <p:nvPr/>
         </p:nvSpPr>
         <p:spPr>
           <a:xfrm>
-            <a:off x="685800" y="2130425"/>
-            <a:ext cx="7772400" cy="1470025"/>
+            <a:off x="2382" y="6400800"/>
+            <a:ext cx="9141619" cy="457200"/>
+          </a:xfrm>
+          <a:prstGeom prst="rect">
+            <a:avLst/>
+          </a:prstGeom>
+          <a:solidFill>
+            <a:schemeClr val="accent2"/>
+          </a:solidFill>
+          <a:ln>
+            <a:noFill/>
+          </a:ln>
+        </p:spPr>
+        <p:style>
+          <a:lnRef idx="2">
+            <a:schemeClr val="accent1">
+              <a:shade val="50000"/>
+            </a:schemeClr>
+          </a:lnRef>
+          <a:fillRef idx="1">
+            <a:schemeClr val="accent1"/>
+          </a:fillRef>
+          <a:effectRef idx="0">
+            <a:schemeClr val="accent1"/>
+          </a:effectRef>
+          <a:fontRef idx="minor">
+            <a:schemeClr val="lt1"/>
+          </a:fontRef>
+        </p:style>
+      </p:sp>
+      <p:sp>
+        <p:nvSpPr>
+          <p:cNvPr id="8" name="Rectangle 7"/>
+          <p:cNvSpPr/>
+          <p:nvPr/>
+        </p:nvSpPr>
+        <p:spPr>
+          <a:xfrm>
+            <a:off x="12" y="6334316"/>
+            <a:ext cx="9141619" cy="64008"/>
+          </a:xfrm>
+          <a:prstGeom prst="rect">
+            <a:avLst/>
+          </a:prstGeom>
+          <a:solidFill>
+            <a:schemeClr val="accent1"/>
+          </a:solidFill>
+          <a:ln>
+            <a:noFill/>
+          </a:ln>
+        </p:spPr>
+        <p:style>
+          <a:lnRef idx="2">
+            <a:schemeClr val="accent1">
+              <a:shade val="50000"/>
+            </a:schemeClr>
+          </a:lnRef>
+          <a:fillRef idx="1">
+            <a:schemeClr val="accent1"/>
+          </a:fillRef>
+          <a:effectRef idx="0">
+            <a:schemeClr val="accent1"/>
+          </a:effectRef>
+          <a:fontRef idx="minor">
+            <a:schemeClr val="lt1"/>
+          </a:fontRef>
+        </p:style>
+      </p:sp>
+      <p:sp>
+        <p:nvSpPr>
+          <p:cNvPr id="2" name="Title 1"/>
+          <p:cNvSpPr>
+            <a:spLocks noGrp="1"/>
+          </p:cNvSpPr>
+          <p:nvPr>
+            <p:ph type="ctrTitle"/>
+          </p:nvPr>
+        </p:nvSpPr>
+        <p:spPr>
+          <a:xfrm>
+            <a:off x="822960" y="758952"/>
+            <a:ext cx="7543800" cy="3566160"/>
           </a:xfrm>
         </p:spPr>
         <p:txBody>
-          <a:bodyPr/>
-          <a:lstStyle/>
-          <a:p>
-            <a:r>
-              <a:rPr lang="en-US"/>
-              <a:t>Click to edit Master title style</a:t>
-            </a:r>
-          </a:p>
-        </p:txBody>
-      </p:sp>
-      <p:sp>
-        <p:nvSpPr>
-          <p:cNvPr id="3" name="Subtitle 2"/>
-          <p:cNvSpPr>
-            <a:spLocks noGrp="1"/>
-          </p:cNvSpPr>
-          <p:nvPr>
-            <p:ph type="subTitle" idx="1"/>
-          </p:nvPr>
-        </p:nvSpPr>
-        <p:spPr>
-          <a:xfrm>
-            <a:off x="1371600" y="3886200"/>
-            <a:ext cx="6400800" cy="1752600"/>
-          </a:xfrm>
-        </p:spPr>
-        <p:txBody>
-          <a:bodyPr/>
+          <a:bodyPr anchor="b">
+            <a:normAutofit/>
+          </a:bodyPr>
           <a:lstStyle>
-            <a:lvl1pPr marL="0" indent="0" algn="ctr">
-              <a:buNone/>
-              <a:defRPr>
+            <a:lvl1pPr algn="l">
+              <a:lnSpc>
+                <a:spcPct val="85000"/>
+              </a:lnSpc>
+              <a:defRPr sz="8000" spc="-50" baseline="0">
                 <a:solidFill>
                   <a:schemeClr val="tx1">
-                    <a:tint val="75000"/>
+                    <a:lumMod val="85000"/>
+                    <a:lumOff val="15000"/>
                   </a:schemeClr>
                 </a:solidFill>
               </a:defRPr>
             </a:lvl1pPr>
+          </a:lstStyle>
+          <a:p>
+            <a:r>
+              <a:rPr lang="en-US"/>
+              <a:t>Click to edit Master title style</a:t>
+            </a:r>
+            <a:endParaRPr lang="en-US" dirty="0"/>
+          </a:p>
+        </p:txBody>
+      </p:sp>
+      <p:sp>
+        <p:nvSpPr>
+          <p:cNvPr id="3" name="Subtitle 2"/>
+          <p:cNvSpPr>
+            <a:spLocks noGrp="1"/>
+          </p:cNvSpPr>
+          <p:nvPr>
+            <p:ph type="subTitle" idx="1"/>
+          </p:nvPr>
+        </p:nvSpPr>
+        <p:spPr>
+          <a:xfrm>
+            <a:off x="825038" y="4455621"/>
+            <a:ext cx="7543800" cy="1143000"/>
+          </a:xfrm>
+        </p:spPr>
+        <p:txBody>
+          <a:bodyPr lIns="91440" rIns="91440">
+            <a:normAutofit/>
+          </a:bodyPr>
+          <a:lstStyle>
+            <a:lvl1pPr marL="0" indent="0" algn="l">
+              <a:buNone/>
+              <a:defRPr sz="2400" cap="all" spc="200" baseline="0">
+                <a:solidFill>
+                  <a:schemeClr val="tx2"/>
+                </a:solidFill>
+                <a:latin typeface="+mj-lt"/>
+              </a:defRPr>
+            </a:lvl1pPr>
             <a:lvl2pPr marL="457200" indent="0" algn="ctr">
               <a:buNone/>
-              <a:defRPr>
-                <a:solidFill>
-                  <a:schemeClr val="tx1">
-                    <a:tint val="75000"/>
-                  </a:schemeClr>
-                </a:solidFill>
-              </a:defRPr>
+              <a:defRPr sz="2400"/>
             </a:lvl2pPr>
             <a:lvl3pPr marL="914400" indent="0" algn="ctr">
               <a:buNone/>
-              <a:defRPr>
-                <a:solidFill>
-                  <a:schemeClr val="tx1">
-                    <a:tint val="75000"/>
-                  </a:schemeClr>
-                </a:solidFill>
-              </a:defRPr>
+              <a:defRPr sz="2400"/>
             </a:lvl3pPr>
             <a:lvl4pPr marL="1371600" indent="0" algn="ctr">
               <a:buNone/>
-              <a:defRPr>
-                <a:solidFill>
-                  <a:schemeClr val="tx1">
-                    <a:tint val="75000"/>
-                  </a:schemeClr>
-                </a:solidFill>
-              </a:defRPr>
+              <a:defRPr sz="2000"/>
             </a:lvl4pPr>
             <a:lvl5pPr marL="1828800" indent="0" algn="ctr">
               <a:buNone/>
-              <a:defRPr>
-                <a:solidFill>
-                  <a:schemeClr val="tx1">
-                    <a:tint val="75000"/>
-                  </a:schemeClr>
-                </a:solidFill>
-              </a:defRPr>
+              <a:defRPr sz="2000"/>
             </a:lvl5pPr>
             <a:lvl6pPr marL="2286000" indent="0" algn="ctr">
               <a:buNone/>
-              <a:defRPr>
-                <a:solidFill>
-                  <a:schemeClr val="tx1">
-                    <a:tint val="75000"/>
-                  </a:schemeClr>
-                </a:solidFill>
-              </a:defRPr>
+              <a:defRPr sz="2000"/>
             </a:lvl6pPr>
             <a:lvl7pPr marL="2743200" indent="0" algn="ctr">
               <a:buNone/>
-              <a:defRPr>
-                <a:solidFill>
-                  <a:schemeClr val="tx1">
-                    <a:tint val="75000"/>
-                  </a:schemeClr>
-                </a:solidFill>
-              </a:defRPr>
+              <a:defRPr sz="2000"/>
             </a:lvl7pPr>
             <a:lvl8pPr marL="3200400" indent="0" algn="ctr">
               <a:buNone/>
-              <a:defRPr>
-                <a:solidFill>
-                  <a:schemeClr val="tx1">
-                    <a:tint val="75000"/>
-                  </a:schemeClr>
-                </a:solidFill>
-              </a:defRPr>
+              <a:defRPr sz="2000"/>
             </a:lvl8pPr>
             <a:lvl9pPr marL="3657600" indent="0" algn="ctr">
               <a:buNone/>
-              <a:defRPr>
-                <a:solidFill>
-                  <a:schemeClr val="tx1">
-                    <a:tint val="75000"/>
-                  </a:schemeClr>
-                </a:solidFill>
-              </a:defRPr>
+              <a:defRPr sz="2000"/>
             </a:lvl9pPr>
           </a:lstStyle>
           <a:p>
@@ -304,6 +992,7 @@
               <a:rPr lang="en-US"/>
               <a:t>Click to edit Master subtitle style</a:t>
             </a:r>
+            <a:endParaRPr lang="en-US" dirty="0"/>
           </a:p>
         </p:txBody>
       </p:sp>
@@ -324,7 +1013,7 @@
           <a:p>
             <a:fld id="{5BCAD085-E8A6-8845-BD4E-CB4CCA059FC4}" type="datetimeFigureOut">
               <a:rPr lang="en-US" smtClean="0"/>
-              <a:t>12/10/2025</a:t>
+              <a:t>12/18/2025</a:t>
             </a:fld>
             <a:endParaRPr lang="en-US"/>
           </a:p>
@@ -372,10 +1061,48 @@
           </a:p>
         </p:txBody>
       </p:sp>
+      <p:cxnSp>
+        <p:nvCxnSpPr>
+          <p:cNvPr id="9" name="Straight Connector 8"/>
+          <p:cNvCxnSpPr/>
+          <p:nvPr/>
+        </p:nvCxnSpPr>
+        <p:spPr>
+          <a:xfrm>
+            <a:off x="905744" y="4343400"/>
+            <a:ext cx="7406640" cy="0"/>
+          </a:xfrm>
+          <a:prstGeom prst="line">
+            <a:avLst/>
+          </a:prstGeom>
+          <a:ln w="6350">
+            <a:solidFill>
+              <a:schemeClr val="tx1">
+                <a:lumMod val="50000"/>
+                <a:lumOff val="50000"/>
+              </a:schemeClr>
+            </a:solidFill>
+          </a:ln>
+        </p:spPr>
+        <p:style>
+          <a:lnRef idx="1">
+            <a:schemeClr val="accent1"/>
+          </a:lnRef>
+          <a:fillRef idx="0">
+            <a:schemeClr val="accent1"/>
+          </a:fillRef>
+          <a:effectRef idx="0">
+            <a:schemeClr val="accent1"/>
+          </a:effectRef>
+          <a:fontRef idx="minor">
+            <a:schemeClr val="tx1"/>
+          </a:fontRef>
+        </p:style>
+      </p:cxnSp>
     </p:spTree>
     <p:extLst>
       <p:ext uri="{BB962C8B-B14F-4D97-AF65-F5344CB8AC3E}">
-        <p14:creationId xmlns:p14="http://schemas.microsoft.com/office/powerpoint/2010/main" val="3168075583"/>
+        <p14:creationId xmlns:p14="http://schemas.microsoft.com/office/powerpoint/2010/main" val="1276798857"/>
       </p:ext>
     </p:extLst>
   </p:cSld>
@@ -421,6 +1148,7 @@
               <a:rPr lang="en-US"/>
               <a:t>Click to edit Master title style</a:t>
             </a:r>
+            <a:endParaRPr lang="en-US" dirty="0"/>
           </a:p>
         </p:txBody>
       </p:sp>
@@ -436,7 +1164,7 @@
         </p:nvSpPr>
         <p:spPr/>
         <p:txBody>
-          <a:bodyPr vert="eaVert"/>
+          <a:bodyPr vert="eaVert" lIns="45720" tIns="0" rIns="45720" bIns="0"/>
           <a:lstStyle/>
           <a:p>
             <a:pPr lvl="0"/>
@@ -472,6 +1200,7 @@
               <a:rPr lang="en-US"/>
               <a:t>Fifth level</a:t>
             </a:r>
+            <a:endParaRPr lang="en-US" dirty="0"/>
           </a:p>
         </p:txBody>
       </p:sp>
@@ -492,7 +1221,7 @@
           <a:p>
             <a:fld id="{5BCAD085-E8A6-8845-BD4E-CB4CCA059FC4}" type="datetimeFigureOut">
               <a:rPr lang="en-US" smtClean="0"/>
-              <a:t>12/10/2025</a:t>
+              <a:t>12/18/2025</a:t>
             </a:fld>
             <a:endParaRPr lang="en-US"/>
           </a:p>
@@ -543,7 +1272,7 @@
     </p:spTree>
     <p:extLst>
       <p:ext uri="{BB962C8B-B14F-4D97-AF65-F5344CB8AC3E}">
-        <p14:creationId xmlns:p14="http://schemas.microsoft.com/office/powerpoint/2010/main" val="2910927964"/>
+        <p14:creationId xmlns:p14="http://schemas.microsoft.com/office/powerpoint/2010/main" val="301466711"/>
       </p:ext>
     </p:extLst>
   </p:cSld>
@@ -554,7 +1283,7 @@
 </file>
 
 <file path=ppt/slideLayouts/slideLayout11.xml><?xml version="1.0" encoding="utf-8"?>
-<p:sldLayout xmlns:a="http://schemas.openxmlformats.org/drawingml/2006/main" xmlns:r="http://schemas.openxmlformats.org/officeDocument/2006/relationships" xmlns:p="http://schemas.openxmlformats.org/presentationml/2006/main" type="vertTitleAndTx" preserve="1">
+<p:sldLayout xmlns:a="http://schemas.openxmlformats.org/drawingml/2006/main" xmlns:r="http://schemas.openxmlformats.org/officeDocument/2006/relationships" xmlns:p="http://schemas.openxmlformats.org/presentationml/2006/main" showMasterSp="0" type="vertTitleAndTx" preserve="1">
   <p:cSld name="Vertical Title and Text">
     <p:spTree>
       <p:nvGrpSpPr>
@@ -572,18 +1301,94 @@
       </p:grpSpPr>
       <p:sp>
         <p:nvSpPr>
-          <p:cNvPr id="2" name="Vertical Title 1"/>
-          <p:cNvSpPr>
-            <a:spLocks noGrp="1"/>
-          </p:cNvSpPr>
-          <p:nvPr>
-            <p:ph type="title" orient="vert"/>
-          </p:nvPr>
+          <p:cNvPr id="7" name="Rectangle 6"/>
+          <p:cNvSpPr/>
+          <p:nvPr/>
         </p:nvSpPr>
         <p:spPr>
           <a:xfrm>
-            <a:off x="6629400" y="274638"/>
-            <a:ext cx="2057400" cy="5851525"/>
+            <a:off x="2382" y="6400800"/>
+            <a:ext cx="9141619" cy="457200"/>
+          </a:xfrm>
+          <a:prstGeom prst="rect">
+            <a:avLst/>
+          </a:prstGeom>
+          <a:solidFill>
+            <a:schemeClr val="accent2"/>
+          </a:solidFill>
+          <a:ln>
+            <a:noFill/>
+          </a:ln>
+        </p:spPr>
+        <p:style>
+          <a:lnRef idx="2">
+            <a:schemeClr val="accent1">
+              <a:shade val="50000"/>
+            </a:schemeClr>
+          </a:lnRef>
+          <a:fillRef idx="1">
+            <a:schemeClr val="accent1"/>
+          </a:fillRef>
+          <a:effectRef idx="0">
+            <a:schemeClr val="accent1"/>
+          </a:effectRef>
+          <a:fontRef idx="minor">
+            <a:schemeClr val="lt1"/>
+          </a:fontRef>
+        </p:style>
+      </p:sp>
+      <p:sp>
+        <p:nvSpPr>
+          <p:cNvPr id="8" name="Rectangle 7"/>
+          <p:cNvSpPr/>
+          <p:nvPr/>
+        </p:nvSpPr>
+        <p:spPr>
+          <a:xfrm>
+            <a:off x="12" y="6334316"/>
+            <a:ext cx="9141619" cy="64008"/>
+          </a:xfrm>
+          <a:prstGeom prst="rect">
+            <a:avLst/>
+          </a:prstGeom>
+          <a:solidFill>
+            <a:schemeClr val="accent1"/>
+          </a:solidFill>
+          <a:ln>
+            <a:noFill/>
+          </a:ln>
+        </p:spPr>
+        <p:style>
+          <a:lnRef idx="2">
+            <a:schemeClr val="accent1">
+              <a:shade val="50000"/>
+            </a:schemeClr>
+          </a:lnRef>
+          <a:fillRef idx="1">
+            <a:schemeClr val="accent1"/>
+          </a:fillRef>
+          <a:effectRef idx="0">
+            <a:schemeClr val="accent1"/>
+          </a:effectRef>
+          <a:fontRef idx="minor">
+            <a:schemeClr val="lt1"/>
+          </a:fontRef>
+        </p:style>
+      </p:sp>
+      <p:sp>
+        <p:nvSpPr>
+          <p:cNvPr id="2" name="Vertical Title 1"/>
+          <p:cNvSpPr>
+            <a:spLocks noGrp="1"/>
+          </p:cNvSpPr>
+          <p:nvPr>
+            <p:ph type="title" orient="vert"/>
+          </p:nvPr>
+        </p:nvSpPr>
+        <p:spPr>
+          <a:xfrm>
+            <a:off x="6543675" y="414779"/>
+            <a:ext cx="1971675" cy="5757421"/>
           </a:xfrm>
         </p:spPr>
         <p:txBody>
@@ -594,6 +1399,7 @@
               <a:rPr lang="en-US"/>
               <a:t>Click to edit Master title style</a:t>
             </a:r>
+            <a:endParaRPr lang="en-US" dirty="0"/>
           </a:p>
         </p:txBody>
       </p:sp>
@@ -609,12 +1415,12 @@
         </p:nvSpPr>
         <p:spPr>
           <a:xfrm>
-            <a:off x="457200" y="274638"/>
-            <a:ext cx="6019800" cy="5851525"/>
+            <a:off x="628650" y="414779"/>
+            <a:ext cx="5800725" cy="5757420"/>
           </a:xfrm>
         </p:spPr>
         <p:txBody>
-          <a:bodyPr vert="eaVert"/>
+          <a:bodyPr vert="eaVert" lIns="45720" tIns="0" rIns="45720" bIns="0"/>
           <a:lstStyle/>
           <a:p>
             <a:pPr lvl="0"/>
@@ -650,6 +1456,7 @@
               <a:rPr lang="en-US"/>
               <a:t>Fifth level</a:t>
             </a:r>
+            <a:endParaRPr lang="en-US" dirty="0"/>
           </a:p>
         </p:txBody>
       </p:sp>
@@ -670,7 +1477,7 @@
           <a:p>
             <a:fld id="{5BCAD085-E8A6-8845-BD4E-CB4CCA059FC4}" type="datetimeFigureOut">
               <a:rPr lang="en-US" smtClean="0"/>
-              <a:t>12/10/2025</a:t>
+              <a:t>12/18/2025</a:t>
             </a:fld>
             <a:endParaRPr lang="en-US"/>
           </a:p>
@@ -721,7 +1528,7 @@
     </p:spTree>
     <p:extLst>
       <p:ext uri="{BB962C8B-B14F-4D97-AF65-F5344CB8AC3E}">
-        <p14:creationId xmlns:p14="http://schemas.microsoft.com/office/powerpoint/2010/main" val="3612223792"/>
+        <p14:creationId xmlns:p14="http://schemas.microsoft.com/office/powerpoint/2010/main" val="3718003073"/>
       </p:ext>
     </p:extLst>
   </p:cSld>
@@ -767,6 +1574,7 @@
               <a:rPr lang="en-US"/>
               <a:t>Click to edit Master title style</a:t>
             </a:r>
+            <a:endParaRPr lang="en-US" dirty="0"/>
           </a:p>
         </p:txBody>
       </p:sp>
@@ -818,6 +1626,7 @@
               <a:rPr lang="en-US"/>
               <a:t>Fifth level</a:t>
             </a:r>
+            <a:endParaRPr lang="en-US" dirty="0"/>
           </a:p>
         </p:txBody>
       </p:sp>
@@ -838,7 +1647,7 @@
           <a:p>
             <a:fld id="{5BCAD085-E8A6-8845-BD4E-CB4CCA059FC4}" type="datetimeFigureOut">
               <a:rPr lang="en-US" smtClean="0"/>
-              <a:t>12/10/2025</a:t>
+              <a:t>12/18/2025</a:t>
             </a:fld>
             <a:endParaRPr lang="en-US"/>
           </a:p>
@@ -889,7 +1698,7 @@
     </p:spTree>
     <p:extLst>
       <p:ext uri="{BB962C8B-B14F-4D97-AF65-F5344CB8AC3E}">
-        <p14:creationId xmlns:p14="http://schemas.microsoft.com/office/powerpoint/2010/main" val="2614314258"/>
+        <p14:creationId xmlns:p14="http://schemas.microsoft.com/office/powerpoint/2010/main" val="3598879841"/>
       </p:ext>
     </p:extLst>
   </p:cSld>
@@ -900,8 +1709,16 @@
 </file>
 
 <file path=ppt/slideLayouts/slideLayout3.xml><?xml version="1.0" encoding="utf-8"?>
-<p:sldLayout xmlns:a="http://schemas.openxmlformats.org/drawingml/2006/main" xmlns:r="http://schemas.openxmlformats.org/officeDocument/2006/relationships" xmlns:p="http://schemas.openxmlformats.org/presentationml/2006/main" type="secHead" preserve="1">
+<p:sldLayout xmlns:a="http://schemas.openxmlformats.org/drawingml/2006/main" xmlns:r="http://schemas.openxmlformats.org/officeDocument/2006/relationships" xmlns:p="http://schemas.openxmlformats.org/presentationml/2006/main" showMasterSp="0" type="secHead" preserve="1">
   <p:cSld name="Section Header">
+    <p:bg>
+      <p:bgPr>
+        <a:solidFill>
+          <a:schemeClr val="bg1"/>
+        </a:solidFill>
+        <a:effectLst/>
+      </p:bgPr>
+    </p:bg>
     <p:spTree>
       <p:nvGrpSpPr>
         <p:cNvPr id="1" name=""/>
@@ -918,25 +1735,113 @@
       </p:grpSpPr>
       <p:sp>
         <p:nvSpPr>
-          <p:cNvPr id="2" name="Title 1"/>
-          <p:cNvSpPr>
-            <a:spLocks noGrp="1"/>
-          </p:cNvSpPr>
-          <p:nvPr>
-            <p:ph type="title"/>
-          </p:nvPr>
+          <p:cNvPr id="7" name="Rectangle 6"/>
+          <p:cNvSpPr/>
+          <p:nvPr/>
         </p:nvSpPr>
         <p:spPr>
           <a:xfrm>
-            <a:off x="722313" y="4406900"/>
-            <a:ext cx="7772400" cy="1362075"/>
+            <a:off x="2382" y="6400800"/>
+            <a:ext cx="9141619" cy="457200"/>
+          </a:xfrm>
+          <a:prstGeom prst="rect">
+            <a:avLst/>
+          </a:prstGeom>
+          <a:solidFill>
+            <a:schemeClr val="accent2"/>
+          </a:solidFill>
+          <a:ln>
+            <a:noFill/>
+          </a:ln>
+        </p:spPr>
+        <p:style>
+          <a:lnRef idx="2">
+            <a:schemeClr val="accent1">
+              <a:shade val="50000"/>
+            </a:schemeClr>
+          </a:lnRef>
+          <a:fillRef idx="1">
+            <a:schemeClr val="accent1"/>
+          </a:fillRef>
+          <a:effectRef idx="0">
+            <a:schemeClr val="accent1"/>
+          </a:effectRef>
+          <a:fontRef idx="minor">
+            <a:schemeClr val="lt1"/>
+          </a:fontRef>
+        </p:style>
+      </p:sp>
+      <p:sp>
+        <p:nvSpPr>
+          <p:cNvPr id="8" name="Rectangle 7"/>
+          <p:cNvSpPr/>
+          <p:nvPr/>
+        </p:nvSpPr>
+        <p:spPr>
+          <a:xfrm>
+            <a:off x="12" y="6334316"/>
+            <a:ext cx="9141619" cy="64008"/>
+          </a:xfrm>
+          <a:prstGeom prst="rect">
+            <a:avLst/>
+          </a:prstGeom>
+          <a:solidFill>
+            <a:schemeClr val="accent1"/>
+          </a:solidFill>
+          <a:ln>
+            <a:noFill/>
+          </a:ln>
+        </p:spPr>
+        <p:style>
+          <a:lnRef idx="2">
+            <a:schemeClr val="accent1">
+              <a:shade val="50000"/>
+            </a:schemeClr>
+          </a:lnRef>
+          <a:fillRef idx="1">
+            <a:schemeClr val="accent1"/>
+          </a:fillRef>
+          <a:effectRef idx="0">
+            <a:schemeClr val="accent1"/>
+          </a:effectRef>
+          <a:fontRef idx="minor">
+            <a:schemeClr val="lt1"/>
+          </a:fontRef>
+        </p:style>
+      </p:sp>
+      <p:sp>
+        <p:nvSpPr>
+          <p:cNvPr id="2" name="Title 1"/>
+          <p:cNvSpPr>
+            <a:spLocks noGrp="1"/>
+          </p:cNvSpPr>
+          <p:nvPr>
+            <p:ph type="title"/>
+          </p:nvPr>
+        </p:nvSpPr>
+        <p:spPr>
+          <a:xfrm>
+            <a:off x="822960" y="758952"/>
+            <a:ext cx="7543800" cy="3566160"/>
           </a:xfrm>
         </p:spPr>
         <p:txBody>
-          <a:bodyPr anchor="t"/>
+          <a:bodyPr anchor="b" anchorCtr="0">
+            <a:normAutofit/>
+          </a:bodyPr>
           <a:lstStyle>
-            <a:lvl1pPr algn="l">
-              <a:defRPr sz="4000" b="1" cap="all"/>
+            <a:lvl1pPr>
+              <a:lnSpc>
+                <a:spcPct val="85000"/>
+              </a:lnSpc>
+              <a:defRPr sz="8000" b="0">
+                <a:solidFill>
+                  <a:schemeClr val="tx1">
+                    <a:lumMod val="85000"/>
+                    <a:lumOff val="15000"/>
+                  </a:schemeClr>
+                </a:solidFill>
+              </a:defRPr>
             </a:lvl1pPr>
           </a:lstStyle>
           <a:p>
@@ -944,6 +1849,7 @@
               <a:rPr lang="en-US"/>
               <a:t>Click to edit Master title style</a:t>
             </a:r>
+            <a:endParaRPr lang="en-US" dirty="0"/>
           </a:p>
         </p:txBody>
       </p:sp>
@@ -959,21 +1865,22 @@
         </p:nvSpPr>
         <p:spPr>
           <a:xfrm>
-            <a:off x="722313" y="2906713"/>
-            <a:ext cx="7772400" cy="1500187"/>
+            <a:off x="822960" y="4453128"/>
+            <a:ext cx="7543800" cy="1143000"/>
           </a:xfrm>
         </p:spPr>
         <p:txBody>
-          <a:bodyPr anchor="b"/>
+          <a:bodyPr lIns="91440" rIns="91440" anchor="t" anchorCtr="0">
+            <a:normAutofit/>
+          </a:bodyPr>
           <a:lstStyle>
             <a:lvl1pPr marL="0" indent="0">
               <a:buNone/>
-              <a:defRPr sz="2000">
+              <a:defRPr sz="2400" cap="all" spc="200" baseline="0">
                 <a:solidFill>
-                  <a:schemeClr val="tx1">
-                    <a:tint val="75000"/>
-                  </a:schemeClr>
+                  <a:schemeClr val="tx2"/>
                 </a:solidFill>
+                <a:latin typeface="+mj-lt"/>
               </a:defRPr>
             </a:lvl1pPr>
             <a:lvl2pPr marL="457200" indent="0">
@@ -1083,7 +1990,7 @@
           <a:p>
             <a:fld id="{5BCAD085-E8A6-8845-BD4E-CB4CCA059FC4}" type="datetimeFigureOut">
               <a:rPr lang="en-US" smtClean="0"/>
-              <a:t>12/10/2025</a:t>
+              <a:t>12/18/2025</a:t>
             </a:fld>
             <a:endParaRPr lang="en-US"/>
           </a:p>
@@ -1131,10 +2038,48 @@
           </a:p>
         </p:txBody>
       </p:sp>
+      <p:cxnSp>
+        <p:nvCxnSpPr>
+          <p:cNvPr id="9" name="Straight Connector 8"/>
+          <p:cNvCxnSpPr/>
+          <p:nvPr/>
+        </p:nvCxnSpPr>
+        <p:spPr>
+          <a:xfrm>
+            <a:off x="905744" y="4343400"/>
+            <a:ext cx="7406640" cy="0"/>
+          </a:xfrm>
+          <a:prstGeom prst="line">
+            <a:avLst/>
+          </a:prstGeom>
+          <a:ln w="6350">
+            <a:solidFill>
+              <a:schemeClr val="tx1">
+                <a:lumMod val="50000"/>
+                <a:lumOff val="50000"/>
+              </a:schemeClr>
+            </a:solidFill>
+          </a:ln>
+        </p:spPr>
+        <p:style>
+          <a:lnRef idx="1">
+            <a:schemeClr val="accent1"/>
+          </a:lnRef>
+          <a:fillRef idx="0">
+            <a:schemeClr val="accent1"/>
+          </a:fillRef>
+          <a:effectRef idx="0">
+            <a:schemeClr val="accent1"/>
+          </a:effectRef>
+          <a:fontRef idx="minor">
+            <a:schemeClr val="tx1"/>
+          </a:fontRef>
+        </p:style>
+      </p:cxnSp>
     </p:spTree>
     <p:extLst>
       <p:ext uri="{BB962C8B-B14F-4D97-AF65-F5344CB8AC3E}">
-        <p14:creationId xmlns:p14="http://schemas.microsoft.com/office/powerpoint/2010/main" val="960648375"/>
+        <p14:creationId xmlns:p14="http://schemas.microsoft.com/office/powerpoint/2010/main" val="3105359622"/>
       </p:ext>
     </p:extLst>
   </p:cSld>
@@ -1163,7 +2108,7 @@
       </p:grpSpPr>
       <p:sp>
         <p:nvSpPr>
-          <p:cNvPr id="2" name="Title 1"/>
+          <p:cNvPr id="8" name="Title 7"/>
           <p:cNvSpPr>
             <a:spLocks noGrp="1"/>
           </p:cNvSpPr>
@@ -1171,7 +2116,12 @@
             <p:ph type="title"/>
           </p:nvPr>
         </p:nvSpPr>
-        <p:spPr/>
+        <p:spPr>
+          <a:xfrm>
+            <a:off x="822960" y="286604"/>
+            <a:ext cx="7543800" cy="1450757"/>
+          </a:xfrm>
+        </p:spPr>
         <p:txBody>
           <a:bodyPr/>
           <a:lstStyle/>
@@ -1180,6 +2130,7 @@
               <a:rPr lang="en-US"/>
               <a:t>Click to edit Master title style</a:t>
             </a:r>
+            <a:endParaRPr lang="en-US" dirty="0"/>
           </a:p>
         </p:txBody>
       </p:sp>
@@ -1195,41 +2146,13 @@
         </p:nvSpPr>
         <p:spPr>
           <a:xfrm>
-            <a:off x="457200" y="1600200"/>
-            <a:ext cx="4038600" cy="4525963"/>
+            <a:off x="822960" y="1845734"/>
+            <a:ext cx="3703320" cy="4023360"/>
           </a:xfrm>
         </p:spPr>
         <p:txBody>
           <a:bodyPr/>
-          <a:lstStyle>
-            <a:lvl1pPr>
-              <a:defRPr sz="2800"/>
-            </a:lvl1pPr>
-            <a:lvl2pPr>
-              <a:defRPr sz="2400"/>
-            </a:lvl2pPr>
-            <a:lvl3pPr>
-              <a:defRPr sz="2000"/>
-            </a:lvl3pPr>
-            <a:lvl4pPr>
-              <a:defRPr sz="1800"/>
-            </a:lvl4pPr>
-            <a:lvl5pPr>
-              <a:defRPr sz="1800"/>
-            </a:lvl5pPr>
-            <a:lvl6pPr>
-              <a:defRPr sz="1800"/>
-            </a:lvl6pPr>
-            <a:lvl7pPr>
-              <a:defRPr sz="1800"/>
-            </a:lvl7pPr>
-            <a:lvl8pPr>
-              <a:defRPr sz="1800"/>
-            </a:lvl8pPr>
-            <a:lvl9pPr>
-              <a:defRPr sz="1800"/>
-            </a:lvl9pPr>
-          </a:lstStyle>
+          <a:lstStyle/>
           <a:p>
             <a:pPr lvl="0"/>
             <a:r>
@@ -1264,6 +2187,7 @@
               <a:rPr lang="en-US"/>
               <a:t>Fifth level</a:t>
             </a:r>
+            <a:endParaRPr lang="en-US" dirty="0"/>
           </a:p>
         </p:txBody>
       </p:sp>
@@ -1279,41 +2203,13 @@
         </p:nvSpPr>
         <p:spPr>
           <a:xfrm>
-            <a:off x="4648200" y="1600200"/>
-            <a:ext cx="4038600" cy="4525963"/>
+            <a:off x="4663440" y="1845736"/>
+            <a:ext cx="3703320" cy="4023359"/>
           </a:xfrm>
         </p:spPr>
         <p:txBody>
           <a:bodyPr/>
-          <a:lstStyle>
-            <a:lvl1pPr>
-              <a:defRPr sz="2800"/>
-            </a:lvl1pPr>
-            <a:lvl2pPr>
-              <a:defRPr sz="2400"/>
-            </a:lvl2pPr>
-            <a:lvl3pPr>
-              <a:defRPr sz="2000"/>
-            </a:lvl3pPr>
-            <a:lvl4pPr>
-              <a:defRPr sz="1800"/>
-            </a:lvl4pPr>
-            <a:lvl5pPr>
-              <a:defRPr sz="1800"/>
-            </a:lvl5pPr>
-            <a:lvl6pPr>
-              <a:defRPr sz="1800"/>
-            </a:lvl6pPr>
-            <a:lvl7pPr>
-              <a:defRPr sz="1800"/>
-            </a:lvl7pPr>
-            <a:lvl8pPr>
-              <a:defRPr sz="1800"/>
-            </a:lvl8pPr>
-            <a:lvl9pPr>
-              <a:defRPr sz="1800"/>
-            </a:lvl9pPr>
-          </a:lstStyle>
+          <a:lstStyle/>
           <a:p>
             <a:pPr lvl="0"/>
             <a:r>
@@ -1348,6 +2244,7 @@
               <a:rPr lang="en-US"/>
               <a:t>Fifth level</a:t>
             </a:r>
+            <a:endParaRPr lang="en-US" dirty="0"/>
           </a:p>
         </p:txBody>
       </p:sp>
@@ -1368,7 +2265,7 @@
           <a:p>
             <a:fld id="{5BCAD085-E8A6-8845-BD4E-CB4CCA059FC4}" type="datetimeFigureOut">
               <a:rPr lang="en-US" smtClean="0"/>
-              <a:t>12/10/2025</a:t>
+              <a:t>12/18/2025</a:t>
             </a:fld>
             <a:endParaRPr lang="en-US"/>
           </a:p>
@@ -1419,7 +2316,7 @@
     </p:spTree>
     <p:extLst>
       <p:ext uri="{BB962C8B-B14F-4D97-AF65-F5344CB8AC3E}">
-        <p14:creationId xmlns:p14="http://schemas.microsoft.com/office/powerpoint/2010/main" val="2782244947"/>
+        <p14:creationId xmlns:p14="http://schemas.microsoft.com/office/powerpoint/2010/main" val="712375047"/>
       </p:ext>
     </p:extLst>
   </p:cSld>
@@ -1448,7 +2345,7 @@
       </p:grpSpPr>
       <p:sp>
         <p:nvSpPr>
-          <p:cNvPr id="2" name="Title 1"/>
+          <p:cNvPr id="10" name="Title 9"/>
           <p:cNvSpPr>
             <a:spLocks noGrp="1"/>
           </p:cNvSpPr>
@@ -1456,19 +2353,21 @@
             <p:ph type="title"/>
           </p:nvPr>
         </p:nvSpPr>
-        <p:spPr/>
-        <p:txBody>
-          <a:bodyPr/>
-          <a:lstStyle>
-            <a:lvl1pPr>
-              <a:defRPr/>
-            </a:lvl1pPr>
-          </a:lstStyle>
+        <p:spPr>
+          <a:xfrm>
+            <a:off x="822960" y="286604"/>
+            <a:ext cx="7543800" cy="1450757"/>
+          </a:xfrm>
+        </p:spPr>
+        <p:txBody>
+          <a:bodyPr/>
+          <a:lstStyle/>
           <a:p>
             <a:r>
               <a:rPr lang="en-US"/>
               <a:t>Click to edit Master title style</a:t>
             </a:r>
+            <a:endParaRPr lang="en-US" dirty="0"/>
           </a:p>
         </p:txBody>
       </p:sp>
@@ -1484,16 +2383,22 @@
         </p:nvSpPr>
         <p:spPr>
           <a:xfrm>
-            <a:off x="457200" y="1535113"/>
-            <a:ext cx="4040188" cy="639762"/>
+            <a:off x="822960" y="1846052"/>
+            <a:ext cx="3703320" cy="736282"/>
           </a:xfrm>
         </p:spPr>
         <p:txBody>
-          <a:bodyPr anchor="b"/>
+          <a:bodyPr lIns="91440" rIns="91440" anchor="ctr">
+            <a:normAutofit/>
+          </a:bodyPr>
           <a:lstStyle>
             <a:lvl1pPr marL="0" indent="0">
               <a:buNone/>
-              <a:defRPr sz="2400" b="1"/>
+              <a:defRPr sz="2000" b="0" cap="all" baseline="0">
+                <a:solidFill>
+                  <a:schemeClr val="tx2"/>
+                </a:solidFill>
+              </a:defRPr>
             </a:lvl1pPr>
             <a:lvl2pPr marL="457200" indent="0">
               <a:buNone/>
@@ -1549,41 +2454,13 @@
         </p:nvSpPr>
         <p:spPr>
           <a:xfrm>
-            <a:off x="457200" y="2174875"/>
-            <a:ext cx="4040188" cy="3951288"/>
+            <a:off x="822960" y="2582334"/>
+            <a:ext cx="3703320" cy="3286760"/>
           </a:xfrm>
         </p:spPr>
         <p:txBody>
           <a:bodyPr/>
-          <a:lstStyle>
-            <a:lvl1pPr>
-              <a:defRPr sz="2400"/>
-            </a:lvl1pPr>
-            <a:lvl2pPr>
-              <a:defRPr sz="2000"/>
-            </a:lvl2pPr>
-            <a:lvl3pPr>
-              <a:defRPr sz="1800"/>
-            </a:lvl3pPr>
-            <a:lvl4pPr>
-              <a:defRPr sz="1600"/>
-            </a:lvl4pPr>
-            <a:lvl5pPr>
-              <a:defRPr sz="1600"/>
-            </a:lvl5pPr>
-            <a:lvl6pPr>
-              <a:defRPr sz="1600"/>
-            </a:lvl6pPr>
-            <a:lvl7pPr>
-              <a:defRPr sz="1600"/>
-            </a:lvl7pPr>
-            <a:lvl8pPr>
-              <a:defRPr sz="1600"/>
-            </a:lvl8pPr>
-            <a:lvl9pPr>
-              <a:defRPr sz="1600"/>
-            </a:lvl9pPr>
-          </a:lstStyle>
+          <a:lstStyle/>
           <a:p>
             <a:pPr lvl="0"/>
             <a:r>
@@ -1618,6 +2495,7 @@
               <a:rPr lang="en-US"/>
               <a:t>Fifth level</a:t>
             </a:r>
+            <a:endParaRPr lang="en-US" dirty="0"/>
           </a:p>
         </p:txBody>
       </p:sp>
@@ -1633,16 +2511,22 @@
         </p:nvSpPr>
         <p:spPr>
           <a:xfrm>
-            <a:off x="4645025" y="1535113"/>
-            <a:ext cx="4041775" cy="639762"/>
+            <a:off x="4663440" y="1846052"/>
+            <a:ext cx="3703320" cy="736282"/>
           </a:xfrm>
         </p:spPr>
         <p:txBody>
-          <a:bodyPr anchor="b"/>
+          <a:bodyPr lIns="91440" rIns="91440" anchor="ctr">
+            <a:normAutofit/>
+          </a:bodyPr>
           <a:lstStyle>
             <a:lvl1pPr marL="0" indent="0">
               <a:buNone/>
-              <a:defRPr sz="2400" b="1"/>
+              <a:defRPr sz="2000" b="0" cap="all" baseline="0">
+                <a:solidFill>
+                  <a:schemeClr val="tx2"/>
+                </a:solidFill>
+              </a:defRPr>
             </a:lvl1pPr>
             <a:lvl2pPr marL="457200" indent="0">
               <a:buNone/>
@@ -1698,41 +2582,13 @@
         </p:nvSpPr>
         <p:spPr>
           <a:xfrm>
-            <a:off x="4645025" y="2174875"/>
-            <a:ext cx="4041775" cy="3951288"/>
+            <a:off x="4663440" y="2582334"/>
+            <a:ext cx="3703320" cy="3286760"/>
           </a:xfrm>
         </p:spPr>
         <p:txBody>
           <a:bodyPr/>
-          <a:lstStyle>
-            <a:lvl1pPr>
-              <a:defRPr sz="2400"/>
-            </a:lvl1pPr>
-            <a:lvl2pPr>
-              <a:defRPr sz="2000"/>
-            </a:lvl2pPr>
-            <a:lvl3pPr>
-              <a:defRPr sz="1800"/>
-            </a:lvl3pPr>
-            <a:lvl4pPr>
-              <a:defRPr sz="1600"/>
-            </a:lvl4pPr>
-            <a:lvl5pPr>
-              <a:defRPr sz="1600"/>
-            </a:lvl5pPr>
-            <a:lvl6pPr>
-              <a:defRPr sz="1600"/>
-            </a:lvl6pPr>
-            <a:lvl7pPr>
-              <a:defRPr sz="1600"/>
-            </a:lvl7pPr>
-            <a:lvl8pPr>
-              <a:defRPr sz="1600"/>
-            </a:lvl8pPr>
-            <a:lvl9pPr>
-              <a:defRPr sz="1600"/>
-            </a:lvl9pPr>
-          </a:lstStyle>
+          <a:lstStyle/>
           <a:p>
             <a:pPr lvl="0"/>
             <a:r>
@@ -1767,6 +2623,7 @@
               <a:rPr lang="en-US"/>
               <a:t>Fifth level</a:t>
             </a:r>
+            <a:endParaRPr lang="en-US" dirty="0"/>
           </a:p>
         </p:txBody>
       </p:sp>
@@ -1787,7 +2644,7 @@
           <a:p>
             <a:fld id="{5BCAD085-E8A6-8845-BD4E-CB4CCA059FC4}" type="datetimeFigureOut">
               <a:rPr lang="en-US" smtClean="0"/>
-              <a:t>12/10/2025</a:t>
+              <a:t>12/18/2025</a:t>
             </a:fld>
             <a:endParaRPr lang="en-US"/>
           </a:p>
@@ -1838,7 +2695,7 @@
     </p:spTree>
     <p:extLst>
       <p:ext uri="{BB962C8B-B14F-4D97-AF65-F5344CB8AC3E}">
-        <p14:creationId xmlns:p14="http://schemas.microsoft.com/office/powerpoint/2010/main" val="990158736"/>
+        <p14:creationId xmlns:p14="http://schemas.microsoft.com/office/powerpoint/2010/main" val="1445630752"/>
       </p:ext>
     </p:extLst>
   </p:cSld>
@@ -1884,6 +2741,7 @@
               <a:rPr lang="en-US"/>
               <a:t>Click to edit Master title style</a:t>
             </a:r>
+            <a:endParaRPr lang="en-US" dirty="0"/>
           </a:p>
         </p:txBody>
       </p:sp>
@@ -1904,7 +2762,7 @@
           <a:p>
             <a:fld id="{5BCAD085-E8A6-8845-BD4E-CB4CCA059FC4}" type="datetimeFigureOut">
               <a:rPr lang="en-US" smtClean="0"/>
-              <a:t>12/10/2025</a:t>
+              <a:t>12/18/2025</a:t>
             </a:fld>
             <a:endParaRPr lang="en-US"/>
           </a:p>
@@ -1955,7 +2813,7 @@
     </p:spTree>
     <p:extLst>
       <p:ext uri="{BB962C8B-B14F-4D97-AF65-F5344CB8AC3E}">
-        <p14:creationId xmlns:p14="http://schemas.microsoft.com/office/powerpoint/2010/main" val="727027711"/>
+        <p14:creationId xmlns:p14="http://schemas.microsoft.com/office/powerpoint/2010/main" val="253263984"/>
       </p:ext>
     </p:extLst>
   </p:cSld>
@@ -1966,7 +2824,7 @@
 </file>
 
 <file path=ppt/slideLayouts/slideLayout7.xml><?xml version="1.0" encoding="utf-8"?>
-<p:sldLayout xmlns:a="http://schemas.openxmlformats.org/drawingml/2006/main" xmlns:r="http://schemas.openxmlformats.org/officeDocument/2006/relationships" xmlns:p="http://schemas.openxmlformats.org/presentationml/2006/main" type="blank" preserve="1">
+<p:sldLayout xmlns:a="http://schemas.openxmlformats.org/drawingml/2006/main" xmlns:r="http://schemas.openxmlformats.org/officeDocument/2006/relationships" xmlns:p="http://schemas.openxmlformats.org/presentationml/2006/main" showMasterSp="0" type="blank" preserve="1">
   <p:cSld name="Blank">
     <p:spTree>
       <p:nvGrpSpPr>
@@ -1984,7 +2842,83 @@
       </p:grpSpPr>
       <p:sp>
         <p:nvSpPr>
-          <p:cNvPr id="2" name="Date Placeholder 1"/>
+          <p:cNvPr id="5" name="Rectangle 4"/>
+          <p:cNvSpPr/>
+          <p:nvPr/>
+        </p:nvSpPr>
+        <p:spPr>
+          <a:xfrm>
+            <a:off x="2382" y="6400800"/>
+            <a:ext cx="9141619" cy="457200"/>
+          </a:xfrm>
+          <a:prstGeom prst="rect">
+            <a:avLst/>
+          </a:prstGeom>
+          <a:solidFill>
+            <a:schemeClr val="accent2"/>
+          </a:solidFill>
+          <a:ln>
+            <a:noFill/>
+          </a:ln>
+        </p:spPr>
+        <p:style>
+          <a:lnRef idx="2">
+            <a:schemeClr val="accent1">
+              <a:shade val="50000"/>
+            </a:schemeClr>
+          </a:lnRef>
+          <a:fillRef idx="1">
+            <a:schemeClr val="accent1"/>
+          </a:fillRef>
+          <a:effectRef idx="0">
+            <a:schemeClr val="accent1"/>
+          </a:effectRef>
+          <a:fontRef idx="minor">
+            <a:schemeClr val="lt1"/>
+          </a:fontRef>
+        </p:style>
+      </p:sp>
+      <p:sp>
+        <p:nvSpPr>
+          <p:cNvPr id="6" name="Rectangle 5"/>
+          <p:cNvSpPr/>
+          <p:nvPr/>
+        </p:nvSpPr>
+        <p:spPr>
+          <a:xfrm>
+            <a:off x="12" y="6334316"/>
+            <a:ext cx="9141619" cy="64008"/>
+          </a:xfrm>
+          <a:prstGeom prst="rect">
+            <a:avLst/>
+          </a:prstGeom>
+          <a:solidFill>
+            <a:schemeClr val="accent1"/>
+          </a:solidFill>
+          <a:ln>
+            <a:noFill/>
+          </a:ln>
+        </p:spPr>
+        <p:style>
+          <a:lnRef idx="2">
+            <a:schemeClr val="accent1">
+              <a:shade val="50000"/>
+            </a:schemeClr>
+          </a:lnRef>
+          <a:fillRef idx="1">
+            <a:schemeClr val="accent1"/>
+          </a:fillRef>
+          <a:effectRef idx="0">
+            <a:schemeClr val="accent1"/>
+          </a:effectRef>
+          <a:fontRef idx="minor">
+            <a:schemeClr val="lt1"/>
+          </a:fontRef>
+        </p:style>
+      </p:sp>
+      <p:sp>
+        <p:nvSpPr>
+          <p:cNvPr id="7" name="Date Placeholder 6"/>
           <p:cNvSpPr>
             <a:spLocks noGrp="1"/>
           </p:cNvSpPr>
@@ -1999,7 +2933,7 @@
           <a:p>
             <a:fld id="{5BCAD085-E8A6-8845-BD4E-CB4CCA059FC4}" type="datetimeFigureOut">
               <a:rPr lang="en-US" smtClean="0"/>
-              <a:t>12/10/2025</a:t>
+              <a:t>12/18/2025</a:t>
             </a:fld>
             <a:endParaRPr lang="en-US"/>
           </a:p>
@@ -2007,7 +2941,7 @@
       </p:sp>
       <p:sp>
         <p:nvSpPr>
-          <p:cNvPr id="3" name="Footer Placeholder 2"/>
+          <p:cNvPr id="8" name="Footer Placeholder 7"/>
           <p:cNvSpPr>
             <a:spLocks noGrp="1"/>
           </p:cNvSpPr>
@@ -2018,7 +2952,15 @@
         <p:spPr/>
         <p:txBody>
           <a:bodyPr/>
-          <a:lstStyle/>
+          <a:lstStyle>
+            <a:lvl1pPr>
+              <a:defRPr>
+                <a:solidFill>
+                  <a:srgbClr val="FFFFFF"/>
+                </a:solidFill>
+              </a:defRPr>
+            </a:lvl1pPr>
+          </a:lstStyle>
           <a:p>
             <a:endParaRPr lang="en-US"/>
           </a:p>
@@ -2026,7 +2968,7 @@
       </p:sp>
       <p:sp>
         <p:nvSpPr>
-          <p:cNvPr id="4" name="Slide Number Placeholder 3"/>
+          <p:cNvPr id="9" name="Slide Number Placeholder 8"/>
           <p:cNvSpPr>
             <a:spLocks noGrp="1"/>
           </p:cNvSpPr>
@@ -2050,7 +2992,7 @@
     </p:spTree>
     <p:extLst>
       <p:ext uri="{BB962C8B-B14F-4D97-AF65-F5344CB8AC3E}">
-        <p14:creationId xmlns:p14="http://schemas.microsoft.com/office/powerpoint/2010/main" val="1212999818"/>
+        <p14:creationId xmlns:p14="http://schemas.microsoft.com/office/powerpoint/2010/main" val="3647538359"/>
       </p:ext>
     </p:extLst>
   </p:cSld>
@@ -2061,7 +3003,7 @@
 </file>
 
 <file path=ppt/slideLayouts/slideLayout8.xml><?xml version="1.0" encoding="utf-8"?>
-<p:sldLayout xmlns:a="http://schemas.openxmlformats.org/drawingml/2006/main" xmlns:r="http://schemas.openxmlformats.org/officeDocument/2006/relationships" xmlns:p="http://schemas.openxmlformats.org/presentationml/2006/main" type="objTx" preserve="1">
+<p:sldLayout xmlns:a="http://schemas.openxmlformats.org/drawingml/2006/main" xmlns:r="http://schemas.openxmlformats.org/officeDocument/2006/relationships" xmlns:p="http://schemas.openxmlformats.org/presentationml/2006/main" showMasterSp="0" type="objTx" preserve="1">
   <p:cSld name="Content with Caption">
     <p:spTree>
       <p:nvGrpSpPr>
@@ -2079,25 +3021,107 @@
       </p:grpSpPr>
       <p:sp>
         <p:nvSpPr>
-          <p:cNvPr id="2" name="Title 1"/>
-          <p:cNvSpPr>
-            <a:spLocks noGrp="1"/>
-          </p:cNvSpPr>
-          <p:nvPr>
-            <p:ph type="title"/>
-          </p:nvPr>
+          <p:cNvPr id="8" name="Rectangle 7"/>
+          <p:cNvSpPr/>
+          <p:nvPr/>
         </p:nvSpPr>
         <p:spPr>
           <a:xfrm>
-            <a:off x="457200" y="273050"/>
-            <a:ext cx="3008313" cy="1162050"/>
+            <a:off x="13" y="0"/>
+            <a:ext cx="3038093" cy="6858000"/>
+          </a:xfrm>
+          <a:prstGeom prst="rect">
+            <a:avLst/>
+          </a:prstGeom>
+          <a:solidFill>
+            <a:schemeClr val="accent2"/>
+          </a:solidFill>
+          <a:ln>
+            <a:noFill/>
+          </a:ln>
+        </p:spPr>
+        <p:style>
+          <a:lnRef idx="2">
+            <a:schemeClr val="accent1">
+              <a:shade val="50000"/>
+            </a:schemeClr>
+          </a:lnRef>
+          <a:fillRef idx="1">
+            <a:schemeClr val="accent1"/>
+          </a:fillRef>
+          <a:effectRef idx="0">
+            <a:schemeClr val="accent1"/>
+          </a:effectRef>
+          <a:fontRef idx="minor">
+            <a:schemeClr val="lt1"/>
+          </a:fontRef>
+        </p:style>
+      </p:sp>
+      <p:sp>
+        <p:nvSpPr>
+          <p:cNvPr id="9" name="Rectangle 8"/>
+          <p:cNvSpPr/>
+          <p:nvPr/>
+        </p:nvSpPr>
+        <p:spPr>
+          <a:xfrm>
+            <a:off x="3030053" y="0"/>
+            <a:ext cx="48006" cy="6858000"/>
+          </a:xfrm>
+          <a:prstGeom prst="rect">
+            <a:avLst/>
+          </a:prstGeom>
+          <a:solidFill>
+            <a:schemeClr val="accent1"/>
+          </a:solidFill>
+          <a:ln>
+            <a:noFill/>
+          </a:ln>
+        </p:spPr>
+        <p:style>
+          <a:lnRef idx="2">
+            <a:schemeClr val="accent1">
+              <a:shade val="50000"/>
+            </a:schemeClr>
+          </a:lnRef>
+          <a:fillRef idx="1">
+            <a:schemeClr val="accent1"/>
+          </a:fillRef>
+          <a:effectRef idx="0">
+            <a:schemeClr val="accent1"/>
+          </a:effectRef>
+          <a:fontRef idx="minor">
+            <a:schemeClr val="lt1"/>
+          </a:fontRef>
+        </p:style>
+      </p:sp>
+      <p:sp>
+        <p:nvSpPr>
+          <p:cNvPr id="2" name="Title 1"/>
+          <p:cNvSpPr>
+            <a:spLocks noGrp="1"/>
+          </p:cNvSpPr>
+          <p:nvPr>
+            <p:ph type="title"/>
+          </p:nvPr>
+        </p:nvSpPr>
+        <p:spPr>
+          <a:xfrm>
+            <a:off x="342900" y="594359"/>
+            <a:ext cx="2400300" cy="2286000"/>
           </a:xfrm>
         </p:spPr>
         <p:txBody>
-          <a:bodyPr anchor="b"/>
+          <a:bodyPr anchor="b">
+            <a:normAutofit/>
+          </a:bodyPr>
           <a:lstStyle>
-            <a:lvl1pPr algn="l">
-              <a:defRPr sz="2000" b="1"/>
+            <a:lvl1pPr>
+              <a:defRPr sz="3600" b="0">
+                <a:solidFill>
+                  <a:srgbClr val="FFFFFF"/>
+                </a:solidFill>
+              </a:defRPr>
             </a:lvl1pPr>
           </a:lstStyle>
           <a:p>
@@ -2105,6 +3129,7 @@
               <a:rPr lang="en-US"/>
               <a:t>Click to edit Master title style</a:t>
             </a:r>
+            <a:endParaRPr lang="en-US" dirty="0"/>
           </a:p>
         </p:txBody>
       </p:sp>
@@ -2120,41 +3145,13 @@
         </p:nvSpPr>
         <p:spPr>
           <a:xfrm>
-            <a:off x="3575050" y="273050"/>
-            <a:ext cx="5111750" cy="5853113"/>
+            <a:off x="3460237" y="731520"/>
+            <a:ext cx="5009393" cy="5257800"/>
           </a:xfrm>
         </p:spPr>
         <p:txBody>
           <a:bodyPr/>
-          <a:lstStyle>
-            <a:lvl1pPr>
-              <a:defRPr sz="3200"/>
-            </a:lvl1pPr>
-            <a:lvl2pPr>
-              <a:defRPr sz="2800"/>
-            </a:lvl2pPr>
-            <a:lvl3pPr>
-              <a:defRPr sz="2400"/>
-            </a:lvl3pPr>
-            <a:lvl4pPr>
-              <a:defRPr sz="2000"/>
-            </a:lvl4pPr>
-            <a:lvl5pPr>
-              <a:defRPr sz="2000"/>
-            </a:lvl5pPr>
-            <a:lvl6pPr>
-              <a:defRPr sz="2000"/>
-            </a:lvl6pPr>
-            <a:lvl7pPr>
-              <a:defRPr sz="2000"/>
-            </a:lvl7pPr>
-            <a:lvl8pPr>
-              <a:defRPr sz="2000"/>
-            </a:lvl8pPr>
-            <a:lvl9pPr>
-              <a:defRPr sz="2000"/>
-            </a:lvl9pPr>
-          </a:lstStyle>
+          <a:lstStyle/>
           <a:p>
             <a:pPr lvl="0"/>
             <a:r>
@@ -2189,6 +3186,7 @@
               <a:rPr lang="en-US"/>
               <a:t>Fifth level</a:t>
             </a:r>
+            <a:endParaRPr lang="en-US" dirty="0"/>
           </a:p>
         </p:txBody>
       </p:sp>
@@ -2204,16 +3202,22 @@
         </p:nvSpPr>
         <p:spPr>
           <a:xfrm>
-            <a:off x="457200" y="1435100"/>
-            <a:ext cx="3008313" cy="4691063"/>
+            <a:off x="342900" y="2926080"/>
+            <a:ext cx="2400300" cy="3379124"/>
           </a:xfrm>
         </p:spPr>
         <p:txBody>
-          <a:bodyPr/>
+          <a:bodyPr lIns="91440" rIns="91440">
+            <a:normAutofit/>
+          </a:bodyPr>
           <a:lstStyle>
             <a:lvl1pPr marL="0" indent="0">
               <a:buNone/>
-              <a:defRPr sz="1400"/>
+              <a:defRPr sz="1500">
+                <a:solidFill>
+                  <a:srgbClr val="FFFFFF"/>
+                </a:solidFill>
+              </a:defRPr>
             </a:lvl1pPr>
             <a:lvl2pPr marL="457200" indent="0">
               <a:buNone/>
@@ -2267,14 +3271,23 @@
             <p:ph type="dt" sz="half" idx="10"/>
           </p:nvPr>
         </p:nvSpPr>
-        <p:spPr/>
-        <p:txBody>
-          <a:bodyPr/>
-          <a:lstStyle/>
+        <p:spPr>
+          <a:xfrm>
+            <a:off x="349134" y="6459786"/>
+            <a:ext cx="1963883" cy="365125"/>
+          </a:xfrm>
+        </p:spPr>
+        <p:txBody>
+          <a:bodyPr/>
+          <a:lstStyle>
+            <a:lvl1pPr algn="l">
+              <a:defRPr/>
+            </a:lvl1pPr>
+          </a:lstStyle>
           <a:p>
             <a:fld id="{5BCAD085-E8A6-8845-BD4E-CB4CCA059FC4}" type="datetimeFigureOut">
               <a:rPr lang="en-US" smtClean="0"/>
-              <a:t>12/10/2025</a:t>
+              <a:t>12/18/2025</a:t>
             </a:fld>
             <a:endParaRPr lang="en-US"/>
           </a:p>
@@ -2290,10 +3303,23 @@
             <p:ph type="ftr" sz="quarter" idx="11"/>
           </p:nvPr>
         </p:nvSpPr>
-        <p:spPr/>
-        <p:txBody>
-          <a:bodyPr/>
-          <a:lstStyle/>
+        <p:spPr>
+          <a:xfrm>
+            <a:off x="3600450" y="6459786"/>
+            <a:ext cx="3486150" cy="365125"/>
+          </a:xfrm>
+        </p:spPr>
+        <p:txBody>
+          <a:bodyPr/>
+          <a:lstStyle>
+            <a:lvl1pPr algn="l">
+              <a:defRPr>
+                <a:solidFill>
+                  <a:schemeClr val="tx2"/>
+                </a:solidFill>
+              </a:defRPr>
+            </a:lvl1pPr>
+          </a:lstStyle>
           <a:p>
             <a:endParaRPr lang="en-US"/>
           </a:p>
@@ -2312,7 +3338,15 @@
         <p:spPr/>
         <p:txBody>
           <a:bodyPr/>
-          <a:lstStyle/>
+          <a:lstStyle>
+            <a:lvl1pPr>
+              <a:defRPr>
+                <a:solidFill>
+                  <a:schemeClr val="tx2"/>
+                </a:solidFill>
+              </a:defRPr>
+            </a:lvl1pPr>
+          </a:lstStyle>
           <a:p>
             <a:fld id="{C1FF6DA9-008F-8B48-92A6-B652298478BF}" type="slidenum">
               <a:rPr lang="en-US" smtClean="0"/>
@@ -2325,7 +3359,7 @@
     </p:spTree>
     <p:extLst>
       <p:ext uri="{BB962C8B-B14F-4D97-AF65-F5344CB8AC3E}">
-        <p14:creationId xmlns:p14="http://schemas.microsoft.com/office/powerpoint/2010/main" val="1840726560"/>
+        <p14:creationId xmlns:p14="http://schemas.microsoft.com/office/powerpoint/2010/main" val="240735088"/>
       </p:ext>
     </p:extLst>
   </p:cSld>
@@ -2336,7 +3370,7 @@
 </file>
 
 <file path=ppt/slideLayouts/slideLayout9.xml><?xml version="1.0" encoding="utf-8"?>
-<p:sldLayout xmlns:a="http://schemas.openxmlformats.org/drawingml/2006/main" xmlns:r="http://schemas.openxmlformats.org/officeDocument/2006/relationships" xmlns:p="http://schemas.openxmlformats.org/presentationml/2006/main" type="picTx" preserve="1">
+<p:sldLayout xmlns:a="http://schemas.openxmlformats.org/drawingml/2006/main" xmlns:r="http://schemas.openxmlformats.org/officeDocument/2006/relationships" xmlns:p="http://schemas.openxmlformats.org/presentationml/2006/main" showMasterSp="0" type="picTx" preserve="1">
   <p:cSld name="Picture with Caption">
     <p:spTree>
       <p:nvGrpSpPr>
@@ -2354,25 +3388,107 @@
       </p:grpSpPr>
       <p:sp>
         <p:nvSpPr>
-          <p:cNvPr id="2" name="Title 1"/>
-          <p:cNvSpPr>
-            <a:spLocks noGrp="1"/>
-          </p:cNvSpPr>
-          <p:nvPr>
-            <p:ph type="title"/>
-          </p:nvPr>
+          <p:cNvPr id="8" name="Rectangle 7"/>
+          <p:cNvSpPr/>
+          <p:nvPr/>
         </p:nvSpPr>
         <p:spPr>
           <a:xfrm>
-            <a:off x="1792288" y="4800600"/>
-            <a:ext cx="5486400" cy="566738"/>
+            <a:off x="0" y="4953000"/>
+            <a:ext cx="9141619" cy="1905000"/>
+          </a:xfrm>
+          <a:prstGeom prst="rect">
+            <a:avLst/>
+          </a:prstGeom>
+          <a:solidFill>
+            <a:schemeClr val="accent2"/>
+          </a:solidFill>
+          <a:ln>
+            <a:noFill/>
+          </a:ln>
+        </p:spPr>
+        <p:style>
+          <a:lnRef idx="2">
+            <a:schemeClr val="accent1">
+              <a:shade val="50000"/>
+            </a:schemeClr>
+          </a:lnRef>
+          <a:fillRef idx="1">
+            <a:schemeClr val="accent1"/>
+          </a:fillRef>
+          <a:effectRef idx="0">
+            <a:schemeClr val="accent1"/>
+          </a:effectRef>
+          <a:fontRef idx="minor">
+            <a:schemeClr val="lt1"/>
+          </a:fontRef>
+        </p:style>
+      </p:sp>
+      <p:sp>
+        <p:nvSpPr>
+          <p:cNvPr id="9" name="Rectangle 8"/>
+          <p:cNvSpPr/>
+          <p:nvPr/>
+        </p:nvSpPr>
+        <p:spPr>
+          <a:xfrm>
+            <a:off x="12" y="4915076"/>
+            <a:ext cx="9141619" cy="64008"/>
+          </a:xfrm>
+          <a:prstGeom prst="rect">
+            <a:avLst/>
+          </a:prstGeom>
+          <a:solidFill>
+            <a:schemeClr val="accent1"/>
+          </a:solidFill>
+          <a:ln>
+            <a:noFill/>
+          </a:ln>
+        </p:spPr>
+        <p:style>
+          <a:lnRef idx="2">
+            <a:schemeClr val="accent1">
+              <a:shade val="50000"/>
+            </a:schemeClr>
+          </a:lnRef>
+          <a:fillRef idx="1">
+            <a:schemeClr val="accent1"/>
+          </a:fillRef>
+          <a:effectRef idx="0">
+            <a:schemeClr val="accent1"/>
+          </a:effectRef>
+          <a:fontRef idx="minor">
+            <a:schemeClr val="lt1"/>
+          </a:fontRef>
+        </p:style>
+      </p:sp>
+      <p:sp>
+        <p:nvSpPr>
+          <p:cNvPr id="2" name="Title 1"/>
+          <p:cNvSpPr>
+            <a:spLocks noGrp="1"/>
+          </p:cNvSpPr>
+          <p:nvPr>
+            <p:ph type="title"/>
+          </p:nvPr>
+        </p:nvSpPr>
+        <p:spPr>
+          <a:xfrm>
+            <a:off x="822960" y="5074920"/>
+            <a:ext cx="7589520" cy="822960"/>
           </a:xfrm>
         </p:spPr>
         <p:txBody>
-          <a:bodyPr anchor="b"/>
+          <a:bodyPr tIns="0" bIns="0" anchor="b">
+            <a:noAutofit/>
+          </a:bodyPr>
           <a:lstStyle>
-            <a:lvl1pPr algn="l">
-              <a:defRPr sz="2000" b="1"/>
+            <a:lvl1pPr>
+              <a:defRPr sz="3600" b="0">
+                <a:solidFill>
+                  <a:srgbClr val="FFFFFF"/>
+                </a:solidFill>
+              </a:defRPr>
             </a:lvl1pPr>
           </a:lstStyle>
           <a:p>
@@ -2380,6 +3496,7 @@
               <a:rPr lang="en-US"/>
               <a:t>Click to edit Master title style</a:t>
             </a:r>
+            <a:endParaRPr lang="en-US" dirty="0"/>
           </a:p>
         </p:txBody>
       </p:sp>
@@ -2387,7 +3504,7 @@
         <p:nvSpPr>
           <p:cNvPr id="3" name="Picture Placeholder 2"/>
           <p:cNvSpPr>
-            <a:spLocks noGrp="1"/>
+            <a:spLocks noGrp="1" noChangeAspect="1"/>
           </p:cNvSpPr>
           <p:nvPr>
             <p:ph type="pic" idx="1"/>
@@ -2395,16 +3512,26 @@
         </p:nvSpPr>
         <p:spPr>
           <a:xfrm>
-            <a:off x="1792288" y="612775"/>
-            <a:ext cx="5486400" cy="4114800"/>
+            <a:off x="12" y="0"/>
+            <a:ext cx="9143989" cy="4915076"/>
           </a:xfrm>
+          <a:blipFill>
+            <a:blip r:embed="rId2"/>
+            <a:stretch>
+              <a:fillRect/>
+            </a:stretch>
+          </a:blipFill>
         </p:spPr>
         <p:txBody>
-          <a:bodyPr/>
+          <a:bodyPr lIns="457200" tIns="457200" anchor="t"/>
           <a:lstStyle>
             <a:lvl1pPr marL="0" indent="0">
               <a:buNone/>
-              <a:defRPr sz="3200"/>
+              <a:defRPr sz="3200">
+                <a:solidFill>
+                  <a:schemeClr val="bg1"/>
+                </a:solidFill>
+              </a:defRPr>
             </a:lvl1pPr>
             <a:lvl2pPr marL="457200" indent="0">
               <a:buNone/>
@@ -2440,7 +3567,11 @@
             </a:lvl9pPr>
           </a:lstStyle>
           <a:p>
-            <a:endParaRPr lang="en-US"/>
+            <a:r>
+              <a:rPr lang="en-US"/>
+              <a:t>Click icon to add picture</a:t>
+            </a:r>
+            <a:endParaRPr lang="en-US" dirty="0"/>
           </a:p>
         </p:txBody>
       </p:sp>
@@ -2456,16 +3587,28 @@
         </p:nvSpPr>
         <p:spPr>
           <a:xfrm>
-            <a:off x="1792288" y="5367338"/>
-            <a:ext cx="5486400" cy="804862"/>
+            <a:off x="822959" y="5907024"/>
+            <a:ext cx="7589520" cy="594360"/>
           </a:xfrm>
         </p:spPr>
         <p:txBody>
-          <a:bodyPr/>
+          <a:bodyPr lIns="91440" tIns="0" rIns="91440" bIns="0">
+            <a:normAutofit/>
+          </a:bodyPr>
           <a:lstStyle>
             <a:lvl1pPr marL="0" indent="0">
+              <a:spcBef>
+                <a:spcPts val="0"/>
+              </a:spcBef>
+              <a:spcAft>
+                <a:spcPts val="600"/>
+              </a:spcAft>
               <a:buNone/>
-              <a:defRPr sz="1400"/>
+              <a:defRPr sz="1500">
+                <a:solidFill>
+                  <a:srgbClr val="FFFFFF"/>
+                </a:solidFill>
+              </a:defRPr>
             </a:lvl1pPr>
             <a:lvl2pPr marL="457200" indent="0">
               <a:buNone/>
@@ -2526,7 +3669,7 @@
           <a:p>
             <a:fld id="{5BCAD085-E8A6-8845-BD4E-CB4CCA059FC4}" type="datetimeFigureOut">
               <a:rPr lang="en-US" smtClean="0"/>
-              <a:t>12/10/2025</a:t>
+              <a:t>12/18/2025</a:t>
             </a:fld>
             <a:endParaRPr lang="en-US"/>
           </a:p>
@@ -2577,7 +3720,7 @@
     </p:spTree>
     <p:extLst>
       <p:ext uri="{BB962C8B-B14F-4D97-AF65-F5344CB8AC3E}">
-        <p14:creationId xmlns:p14="http://schemas.microsoft.com/office/powerpoint/2010/main" val="3889236939"/>
+        <p14:creationId xmlns:p14="http://schemas.microsoft.com/office/powerpoint/2010/main" val="4011650175"/>
       </p:ext>
     </p:extLst>
   </p:cSld>
@@ -2611,25 +3754,101 @@
       </p:grpSpPr>
       <p:sp>
         <p:nvSpPr>
-          <p:cNvPr id="2" name="Title Placeholder 1"/>
-          <p:cNvSpPr>
-            <a:spLocks noGrp="1"/>
-          </p:cNvSpPr>
-          <p:nvPr>
-            <p:ph type="title"/>
-          </p:nvPr>
+          <p:cNvPr id="7" name="Rectangle 6"/>
+          <p:cNvSpPr/>
+          <p:nvPr/>
         </p:nvSpPr>
         <p:spPr>
           <a:xfrm>
-            <a:off x="457200" y="274638"/>
-            <a:ext cx="8229600" cy="1143000"/>
+            <a:off x="0" y="6400800"/>
+            <a:ext cx="9144001" cy="457200"/>
+          </a:xfrm>
+          <a:prstGeom prst="rect">
+            <a:avLst/>
+          </a:prstGeom>
+          <a:solidFill>
+            <a:schemeClr val="accent2"/>
+          </a:solidFill>
+          <a:ln>
+            <a:noFill/>
+          </a:ln>
+        </p:spPr>
+        <p:style>
+          <a:lnRef idx="2">
+            <a:schemeClr val="accent1">
+              <a:shade val="50000"/>
+            </a:schemeClr>
+          </a:lnRef>
+          <a:fillRef idx="1">
+            <a:schemeClr val="accent1"/>
+          </a:fillRef>
+          <a:effectRef idx="0">
+            <a:schemeClr val="accent1"/>
+          </a:effectRef>
+          <a:fontRef idx="minor">
+            <a:schemeClr val="lt1"/>
+          </a:fontRef>
+        </p:style>
+      </p:sp>
+      <p:sp>
+        <p:nvSpPr>
+          <p:cNvPr id="9" name="Rectangle 8"/>
+          <p:cNvSpPr/>
+          <p:nvPr/>
+        </p:nvSpPr>
+        <p:spPr>
+          <a:xfrm>
+            <a:off x="0" y="6334315"/>
+            <a:ext cx="9144001" cy="65999"/>
+          </a:xfrm>
+          <a:prstGeom prst="rect">
+            <a:avLst/>
+          </a:prstGeom>
+          <a:solidFill>
+            <a:schemeClr val="accent1"/>
+          </a:solidFill>
+          <a:ln>
+            <a:noFill/>
+          </a:ln>
+        </p:spPr>
+        <p:style>
+          <a:lnRef idx="2">
+            <a:schemeClr val="accent1">
+              <a:shade val="50000"/>
+            </a:schemeClr>
+          </a:lnRef>
+          <a:fillRef idx="1">
+            <a:schemeClr val="accent1"/>
+          </a:fillRef>
+          <a:effectRef idx="0">
+            <a:schemeClr val="accent1"/>
+          </a:effectRef>
+          <a:fontRef idx="minor">
+            <a:schemeClr val="lt1"/>
+          </a:fontRef>
+        </p:style>
+      </p:sp>
+      <p:sp>
+        <p:nvSpPr>
+          <p:cNvPr id="2" name="Title Placeholder 1"/>
+          <p:cNvSpPr>
+            <a:spLocks noGrp="1"/>
+          </p:cNvSpPr>
+          <p:nvPr>
+            <p:ph type="title"/>
+          </p:nvPr>
+        </p:nvSpPr>
+        <p:spPr>
+          <a:xfrm>
+            <a:off x="822960" y="286604"/>
+            <a:ext cx="7543800" cy="1450757"/>
           </a:xfrm>
           <a:prstGeom prst="rect">
             <a:avLst/>
           </a:prstGeom>
         </p:spPr>
         <p:txBody>
-          <a:bodyPr vert="horz" lIns="91440" tIns="45720" rIns="91440" bIns="45720" rtlCol="0" anchor="ctr">
+          <a:bodyPr vert="horz" lIns="91440" tIns="45720" rIns="91440" bIns="45720" rtlCol="0" anchor="b">
             <a:normAutofit/>
           </a:bodyPr>
           <a:lstStyle/>
@@ -2638,6 +3857,7 @@
               <a:rPr lang="en-US"/>
               <a:t>Click to edit Master title style</a:t>
             </a:r>
+            <a:endParaRPr lang="en-US" dirty="0"/>
           </a:p>
         </p:txBody>
       </p:sp>
@@ -2653,15 +3873,15 @@
         </p:nvSpPr>
         <p:spPr>
           <a:xfrm>
-            <a:off x="457200" y="1600200"/>
-            <a:ext cx="8229600" cy="4525963"/>
+            <a:off x="822959" y="1845734"/>
+            <a:ext cx="7543801" cy="4023360"/>
           </a:xfrm>
           <a:prstGeom prst="rect">
             <a:avLst/>
           </a:prstGeom>
         </p:spPr>
         <p:txBody>
-          <a:bodyPr vert="horz" lIns="91440" tIns="45720" rIns="91440" bIns="45720" rtlCol="0">
+          <a:bodyPr vert="horz" lIns="0" tIns="45720" rIns="0" bIns="45720" rtlCol="0">
             <a:normAutofit/>
           </a:bodyPr>
           <a:lstStyle/>
@@ -2699,6 +3919,7 @@
               <a:rPr lang="en-US"/>
               <a:t>Fifth level</a:t>
             </a:r>
+            <a:endParaRPr lang="en-US" dirty="0"/>
           </a:p>
         </p:txBody>
       </p:sp>
@@ -2714,8 +3935,8 @@
         </p:nvSpPr>
         <p:spPr>
           <a:xfrm>
-            <a:off x="457200" y="6356350"/>
-            <a:ext cx="2133600" cy="365125"/>
+            <a:off x="822961" y="6459786"/>
+            <a:ext cx="1854203" cy="365125"/>
           </a:xfrm>
           <a:prstGeom prst="rect">
             <a:avLst/>
@@ -2725,11 +3946,9 @@
           <a:bodyPr vert="horz" lIns="91440" tIns="45720" rIns="91440" bIns="45720" rtlCol="0" anchor="ctr"/>
           <a:lstStyle>
             <a:lvl1pPr algn="l">
-              <a:defRPr sz="1200">
+              <a:defRPr sz="900">
                 <a:solidFill>
-                  <a:schemeClr val="tx1">
-                    <a:tint val="75000"/>
-                  </a:schemeClr>
+                  <a:srgbClr val="FFFFFF"/>
                 </a:solidFill>
               </a:defRPr>
             </a:lvl1pPr>
@@ -2737,7 +3956,7 @@
           <a:p>
             <a:fld id="{5BCAD085-E8A6-8845-BD4E-CB4CCA059FC4}" type="datetimeFigureOut">
               <a:rPr lang="en-US" smtClean="0"/>
-              <a:t>12/10/2025</a:t>
+              <a:t>12/18/2025</a:t>
             </a:fld>
             <a:endParaRPr lang="en-US"/>
           </a:p>
@@ -2755,8 +3974,8 @@
         </p:nvSpPr>
         <p:spPr>
           <a:xfrm>
-            <a:off x="3124200" y="6356350"/>
-            <a:ext cx="2895600" cy="365125"/>
+            <a:off x="2764639" y="6459786"/>
+            <a:ext cx="3617103" cy="365125"/>
           </a:xfrm>
           <a:prstGeom prst="rect">
             <a:avLst/>
@@ -2766,11 +3985,9 @@
           <a:bodyPr vert="horz" lIns="91440" tIns="45720" rIns="91440" bIns="45720" rtlCol="0" anchor="ctr"/>
           <a:lstStyle>
             <a:lvl1pPr algn="ctr">
-              <a:defRPr sz="1200">
+              <a:defRPr sz="900" cap="all" baseline="0">
                 <a:solidFill>
-                  <a:schemeClr val="tx1">
-                    <a:tint val="75000"/>
-                  </a:schemeClr>
+                  <a:srgbClr val="FFFFFF"/>
                 </a:solidFill>
               </a:defRPr>
             </a:lvl1pPr>
@@ -2792,8 +4009,8 @@
         </p:nvSpPr>
         <p:spPr>
           <a:xfrm>
-            <a:off x="6553200" y="6356350"/>
-            <a:ext cx="2133600" cy="365125"/>
+            <a:off x="7425344" y="6459786"/>
+            <a:ext cx="984019" cy="365125"/>
           </a:xfrm>
           <a:prstGeom prst="rect">
             <a:avLst/>
@@ -2803,11 +4020,9 @@
           <a:bodyPr vert="horz" lIns="91440" tIns="45720" rIns="91440" bIns="45720" rtlCol="0" anchor="ctr"/>
           <a:lstStyle>
             <a:lvl1pPr algn="r">
-              <a:defRPr sz="1200">
+              <a:defRPr sz="1050">
                 <a:solidFill>
-                  <a:schemeClr val="tx1">
-                    <a:tint val="75000"/>
-                  </a:schemeClr>
+                  <a:srgbClr val="FFFFFF"/>
                 </a:solidFill>
               </a:defRPr>
             </a:lvl1pPr>
@@ -2821,37 +4036,81 @@
           </a:p>
         </p:txBody>
       </p:sp>
+      <p:cxnSp>
+        <p:nvCxnSpPr>
+          <p:cNvPr id="10" name="Straight Connector 9"/>
+          <p:cNvCxnSpPr/>
+          <p:nvPr/>
+        </p:nvCxnSpPr>
+        <p:spPr>
+          <a:xfrm>
+            <a:off x="895149" y="1737845"/>
+            <a:ext cx="7475220" cy="0"/>
+          </a:xfrm>
+          <a:prstGeom prst="line">
+            <a:avLst/>
+          </a:prstGeom>
+          <a:ln w="6350">
+            <a:solidFill>
+              <a:schemeClr val="tx1">
+                <a:lumMod val="50000"/>
+                <a:lumOff val="50000"/>
+              </a:schemeClr>
+            </a:solidFill>
+          </a:ln>
+        </p:spPr>
+        <p:style>
+          <a:lnRef idx="1">
+            <a:schemeClr val="accent1"/>
+          </a:lnRef>
+          <a:fillRef idx="0">
+            <a:schemeClr val="accent1"/>
+          </a:fillRef>
+          <a:effectRef idx="0">
+            <a:schemeClr val="accent1"/>
+          </a:effectRef>
+          <a:fontRef idx="minor">
+            <a:schemeClr val="tx1"/>
+          </a:fontRef>
+        </p:style>
+      </p:cxnSp>
     </p:spTree>
     <p:extLst>
       <p:ext uri="{BB962C8B-B14F-4D97-AF65-F5344CB8AC3E}">
-        <p14:creationId xmlns:p14="http://schemas.microsoft.com/office/powerpoint/2010/main" val="2209977519"/>
+        <p14:creationId xmlns:p14="http://schemas.microsoft.com/office/powerpoint/2010/main" val="3496125278"/>
       </p:ext>
     </p:extLst>
   </p:cSld>
   <p:clrMap bg1="lt1" tx1="dk1" bg2="lt2" tx2="dk2" accent1="accent1" accent2="accent2" accent3="accent3" accent4="accent4" accent5="accent5" accent6="accent6" hlink="hlink" folHlink="folHlink"/>
   <p:sldLayoutIdLst>
-    <p:sldLayoutId id="2147483649" r:id="rId1"/>
-    <p:sldLayoutId id="2147483650" r:id="rId2"/>
-    <p:sldLayoutId id="2147483651" r:id="rId3"/>
-    <p:sldLayoutId id="2147483652" r:id="rId4"/>
-    <p:sldLayoutId id="2147483653" r:id="rId5"/>
-    <p:sldLayoutId id="2147483654" r:id="rId6"/>
-    <p:sldLayoutId id="2147483655" r:id="rId7"/>
-    <p:sldLayoutId id="2147483656" r:id="rId8"/>
-    <p:sldLayoutId id="2147483657" r:id="rId9"/>
-    <p:sldLayoutId id="2147483658" r:id="rId10"/>
-    <p:sldLayoutId id="2147483659" r:id="rId11"/>
+    <p:sldLayoutId id="2147483661" r:id="rId1"/>
+    <p:sldLayoutId id="2147483662" r:id="rId2"/>
+    <p:sldLayoutId id="2147483663" r:id="rId3"/>
+    <p:sldLayoutId id="2147483664" r:id="rId4"/>
+    <p:sldLayoutId id="2147483665" r:id="rId5"/>
+    <p:sldLayoutId id="2147483666" r:id="rId6"/>
+    <p:sldLayoutId id="2147483667" r:id="rId7"/>
+    <p:sldLayoutId id="2147483668" r:id="rId8"/>
+    <p:sldLayoutId id="2147483669" r:id="rId9"/>
+    <p:sldLayoutId id="2147483670" r:id="rId10"/>
+    <p:sldLayoutId id="2147483671" r:id="rId11"/>
   </p:sldLayoutIdLst>
   <p:txStyles>
     <p:titleStyle>
-      <a:lvl1pPr algn="ctr" defTabSz="457200" rtl="0" eaLnBrk="1" latinLnBrk="0" hangingPunct="1">
+      <a:lvl1pPr algn="l" defTabSz="914400" rtl="0" eaLnBrk="1" latinLnBrk="0" hangingPunct="1">
+        <a:lnSpc>
+          <a:spcPct val="85000"/>
+        </a:lnSpc>
         <a:spcBef>
           <a:spcPct val="0"/>
         </a:spcBef>
         <a:buNone/>
-        <a:defRPr sz="4400" kern="1200">
+        <a:defRPr sz="4800" kern="1200" spc="-50" baseline="0">
           <a:solidFill>
-            <a:schemeClr val="tx1"/>
+            <a:schemeClr val="tx1">
+              <a:lumMod val="75000"/>
+              <a:lumOff val="25000"/>
+            </a:schemeClr>
           </a:solidFill>
           <a:latin typeface="+mj-lt"/>
           <a:ea typeface="+mj-ea"/>
@@ -2860,135 +4119,244 @@
       </a:lvl1pPr>
     </p:titleStyle>
     <p:bodyStyle>
-      <a:lvl1pPr marL="342900" indent="-342900" algn="l" defTabSz="457200" rtl="0" eaLnBrk="1" latinLnBrk="0" hangingPunct="1">
+      <a:lvl1pPr marL="91440" indent="-91440" algn="l" defTabSz="914400" rtl="0" eaLnBrk="1" latinLnBrk="0" hangingPunct="1">
+        <a:lnSpc>
+          <a:spcPct val="90000"/>
+        </a:lnSpc>
         <a:spcBef>
-          <a:spcPct val="20000"/>
+          <a:spcPts val="1200"/>
         </a:spcBef>
-        <a:buFont typeface="Arial"/>
-        <a:buChar char="•"/>
-        <a:defRPr sz="3200" kern="1200">
+        <a:spcAft>
+          <a:spcPts val="200"/>
+        </a:spcAft>
+        <a:buClr>
+          <a:schemeClr val="accent1"/>
+        </a:buClr>
+        <a:buSzPct val="100000"/>
+        <a:buFont typeface="Calibri" panose="020F0502020204030204" pitchFamily="34" charset="0"/>
+        <a:buChar char=" "/>
+        <a:defRPr sz="2000" kern="1200">
           <a:solidFill>
-            <a:schemeClr val="tx1"/>
+            <a:schemeClr val="tx1">
+              <a:lumMod val="75000"/>
+              <a:lumOff val="25000"/>
+            </a:schemeClr>
           </a:solidFill>
           <a:latin typeface="+mn-lt"/>
           <a:ea typeface="+mn-ea"/>
           <a:cs typeface="+mn-cs"/>
         </a:defRPr>
       </a:lvl1pPr>
-      <a:lvl2pPr marL="742950" indent="-285750" algn="l" defTabSz="457200" rtl="0" eaLnBrk="1" latinLnBrk="0" hangingPunct="1">
+      <a:lvl2pPr marL="384048" indent="-182880" algn="l" defTabSz="914400" rtl="0" eaLnBrk="1" latinLnBrk="0" hangingPunct="1">
+        <a:lnSpc>
+          <a:spcPct val="90000"/>
+        </a:lnSpc>
         <a:spcBef>
-          <a:spcPct val="20000"/>
+          <a:spcPts val="200"/>
         </a:spcBef>
-        <a:buFont typeface="Arial"/>
-        <a:buChar char="–"/>
-        <a:defRPr sz="2800" kern="1200">
+        <a:spcAft>
+          <a:spcPts val="400"/>
+        </a:spcAft>
+        <a:buClr>
+          <a:schemeClr val="accent1"/>
+        </a:buClr>
+        <a:buFont typeface="Calibri" pitchFamily="34" charset="0"/>
+        <a:buChar char="◦"/>
+        <a:defRPr sz="1800" kern="1200">
           <a:solidFill>
-            <a:schemeClr val="tx1"/>
+            <a:schemeClr val="tx1">
+              <a:lumMod val="75000"/>
+              <a:lumOff val="25000"/>
+            </a:schemeClr>
           </a:solidFill>
           <a:latin typeface="+mn-lt"/>
           <a:ea typeface="+mn-ea"/>
           <a:cs typeface="+mn-cs"/>
         </a:defRPr>
       </a:lvl2pPr>
-      <a:lvl3pPr marL="1143000" indent="-228600" algn="l" defTabSz="457200" rtl="0" eaLnBrk="1" latinLnBrk="0" hangingPunct="1">
+      <a:lvl3pPr marL="566928" indent="-182880" algn="l" defTabSz="914400" rtl="0" eaLnBrk="1" latinLnBrk="0" hangingPunct="1">
+        <a:lnSpc>
+          <a:spcPct val="90000"/>
+        </a:lnSpc>
         <a:spcBef>
-          <a:spcPct val="20000"/>
+          <a:spcPts val="200"/>
         </a:spcBef>
-        <a:buFont typeface="Arial"/>
-        <a:buChar char="•"/>
-        <a:defRPr sz="2400" kern="1200">
+        <a:spcAft>
+          <a:spcPts val="400"/>
+        </a:spcAft>
+        <a:buClr>
+          <a:schemeClr val="accent1"/>
+        </a:buClr>
+        <a:buFont typeface="Calibri" pitchFamily="34" charset="0"/>
+        <a:buChar char="◦"/>
+        <a:defRPr sz="1400" kern="1200">
           <a:solidFill>
-            <a:schemeClr val="tx1"/>
+            <a:schemeClr val="tx1">
+              <a:lumMod val="75000"/>
+              <a:lumOff val="25000"/>
+            </a:schemeClr>
           </a:solidFill>
           <a:latin typeface="+mn-lt"/>
           <a:ea typeface="+mn-ea"/>
           <a:cs typeface="+mn-cs"/>
         </a:defRPr>
       </a:lvl3pPr>
-      <a:lvl4pPr marL="1600200" indent="-228600" algn="l" defTabSz="457200" rtl="0" eaLnBrk="1" latinLnBrk="0" hangingPunct="1">
+      <a:lvl4pPr marL="749808" indent="-182880" algn="l" defTabSz="914400" rtl="0" eaLnBrk="1" latinLnBrk="0" hangingPunct="1">
+        <a:lnSpc>
+          <a:spcPct val="90000"/>
+        </a:lnSpc>
         <a:spcBef>
-          <a:spcPct val="20000"/>
+          <a:spcPts val="200"/>
         </a:spcBef>
-        <a:buFont typeface="Arial"/>
-        <a:buChar char="–"/>
-        <a:defRPr sz="2000" kern="1200">
+        <a:spcAft>
+          <a:spcPts val="400"/>
+        </a:spcAft>
+        <a:buClr>
+          <a:schemeClr val="accent1"/>
+        </a:buClr>
+        <a:buFont typeface="Calibri" pitchFamily="34" charset="0"/>
+        <a:buChar char="◦"/>
+        <a:defRPr sz="1400" kern="1200">
           <a:solidFill>
-            <a:schemeClr val="tx1"/>
+            <a:schemeClr val="tx1">
+              <a:lumMod val="75000"/>
+              <a:lumOff val="25000"/>
+            </a:schemeClr>
           </a:solidFill>
           <a:latin typeface="+mn-lt"/>
           <a:ea typeface="+mn-ea"/>
           <a:cs typeface="+mn-cs"/>
         </a:defRPr>
       </a:lvl4pPr>
-      <a:lvl5pPr marL="2057400" indent="-228600" algn="l" defTabSz="457200" rtl="0" eaLnBrk="1" latinLnBrk="0" hangingPunct="1">
+      <a:lvl5pPr marL="932688" indent="-182880" algn="l" defTabSz="914400" rtl="0" eaLnBrk="1" latinLnBrk="0" hangingPunct="1">
+        <a:lnSpc>
+          <a:spcPct val="90000"/>
+        </a:lnSpc>
         <a:spcBef>
-          <a:spcPct val="20000"/>
+          <a:spcPts val="200"/>
         </a:spcBef>
-        <a:buFont typeface="Arial"/>
-        <a:buChar char="»"/>
-        <a:defRPr sz="2000" kern="1200">
+        <a:spcAft>
+          <a:spcPts val="400"/>
+        </a:spcAft>
+        <a:buClr>
+          <a:schemeClr val="accent1"/>
+        </a:buClr>
+        <a:buFont typeface="Calibri" pitchFamily="34" charset="0"/>
+        <a:buChar char="◦"/>
+        <a:defRPr sz="1400" kern="1200">
           <a:solidFill>
-            <a:schemeClr val="tx1"/>
+            <a:schemeClr val="tx1">
+              <a:lumMod val="75000"/>
+              <a:lumOff val="25000"/>
+            </a:schemeClr>
           </a:solidFill>
           <a:latin typeface="+mn-lt"/>
           <a:ea typeface="+mn-ea"/>
           <a:cs typeface="+mn-cs"/>
         </a:defRPr>
       </a:lvl5pPr>
-      <a:lvl6pPr marL="2514600" indent="-228600" algn="l" defTabSz="457200" rtl="0" eaLnBrk="1" latinLnBrk="0" hangingPunct="1">
+      <a:lvl6pPr marL="1100000" indent="-228600" algn="l" defTabSz="914400" rtl="0" eaLnBrk="1" latinLnBrk="0" hangingPunct="1">
+        <a:lnSpc>
+          <a:spcPct val="90000"/>
+        </a:lnSpc>
         <a:spcBef>
-          <a:spcPct val="20000"/>
+          <a:spcPts val="200"/>
         </a:spcBef>
-        <a:buFont typeface="Arial"/>
-        <a:buChar char="•"/>
-        <a:defRPr sz="2000" kern="1200">
+        <a:spcAft>
+          <a:spcPts val="400"/>
+        </a:spcAft>
+        <a:buClr>
+          <a:schemeClr val="accent1"/>
+        </a:buClr>
+        <a:buFont typeface="Calibri" pitchFamily="34" charset="0"/>
+        <a:buChar char="◦"/>
+        <a:defRPr sz="1400" kern="1200">
           <a:solidFill>
-            <a:schemeClr val="tx1"/>
+            <a:schemeClr val="tx1">
+              <a:lumMod val="75000"/>
+              <a:lumOff val="25000"/>
+            </a:schemeClr>
           </a:solidFill>
           <a:latin typeface="+mn-lt"/>
           <a:ea typeface="+mn-ea"/>
           <a:cs typeface="+mn-cs"/>
         </a:defRPr>
       </a:lvl6pPr>
-      <a:lvl7pPr marL="2971800" indent="-228600" algn="l" defTabSz="457200" rtl="0" eaLnBrk="1" latinLnBrk="0" hangingPunct="1">
+      <a:lvl7pPr marL="1300000" indent="-228600" algn="l" defTabSz="914400" rtl="0" eaLnBrk="1" latinLnBrk="0" hangingPunct="1">
+        <a:lnSpc>
+          <a:spcPct val="90000"/>
+        </a:lnSpc>
         <a:spcBef>
-          <a:spcPct val="20000"/>
+          <a:spcPts val="200"/>
         </a:spcBef>
-        <a:buFont typeface="Arial"/>
-        <a:buChar char="•"/>
-        <a:defRPr sz="2000" kern="1200">
+        <a:spcAft>
+          <a:spcPts val="400"/>
+        </a:spcAft>
+        <a:buClr>
+          <a:schemeClr val="accent1"/>
+        </a:buClr>
+        <a:buFont typeface="Calibri" pitchFamily="34" charset="0"/>
+        <a:buChar char="◦"/>
+        <a:defRPr sz="1400" kern="1200">
           <a:solidFill>
-            <a:schemeClr val="tx1"/>
+            <a:schemeClr val="tx1">
+              <a:lumMod val="75000"/>
+              <a:lumOff val="25000"/>
+            </a:schemeClr>
           </a:solidFill>
           <a:latin typeface="+mn-lt"/>
           <a:ea typeface="+mn-ea"/>
           <a:cs typeface="+mn-cs"/>
         </a:defRPr>
       </a:lvl7pPr>
-      <a:lvl8pPr marL="3429000" indent="-228600" algn="l" defTabSz="457200" rtl="0" eaLnBrk="1" latinLnBrk="0" hangingPunct="1">
+      <a:lvl8pPr marL="1500000" indent="-228600" algn="l" defTabSz="914400" rtl="0" eaLnBrk="1" latinLnBrk="0" hangingPunct="1">
+        <a:lnSpc>
+          <a:spcPct val="90000"/>
+        </a:lnSpc>
         <a:spcBef>
-          <a:spcPct val="20000"/>
+          <a:spcPts val="200"/>
         </a:spcBef>
-        <a:buFont typeface="Arial"/>
-        <a:buChar char="•"/>
-        <a:defRPr sz="2000" kern="1200">
+        <a:spcAft>
+          <a:spcPts val="400"/>
+        </a:spcAft>
+        <a:buClr>
+          <a:schemeClr val="accent1"/>
+        </a:buClr>
+        <a:buFont typeface="Calibri" pitchFamily="34" charset="0"/>
+        <a:buChar char="◦"/>
+        <a:defRPr sz="1400" kern="1200">
           <a:solidFill>
-            <a:schemeClr val="tx1"/>
+            <a:schemeClr val="tx1">
+              <a:lumMod val="75000"/>
+              <a:lumOff val="25000"/>
+            </a:schemeClr>
           </a:solidFill>
           <a:latin typeface="+mn-lt"/>
           <a:ea typeface="+mn-ea"/>
           <a:cs typeface="+mn-cs"/>
         </a:defRPr>
       </a:lvl8pPr>
-      <a:lvl9pPr marL="3886200" indent="-228600" algn="l" defTabSz="457200" rtl="0" eaLnBrk="1" latinLnBrk="0" hangingPunct="1">
+      <a:lvl9pPr marL="1700000" indent="-228600" algn="l" defTabSz="914400" rtl="0" eaLnBrk="1" latinLnBrk="0" hangingPunct="1">
+        <a:lnSpc>
+          <a:spcPct val="90000"/>
+        </a:lnSpc>
         <a:spcBef>
-          <a:spcPct val="20000"/>
+          <a:spcPts val="200"/>
         </a:spcBef>
-        <a:buFont typeface="Arial"/>
-        <a:buChar char="•"/>
-        <a:defRPr sz="2000" kern="1200">
+        <a:spcAft>
+          <a:spcPts val="400"/>
+        </a:spcAft>
+        <a:buClr>
+          <a:schemeClr val="accent1"/>
+        </a:buClr>
+        <a:buFont typeface="Calibri" pitchFamily="34" charset="0"/>
+        <a:buChar char="◦"/>
+        <a:defRPr sz="1400" kern="1200">
           <a:solidFill>
-            <a:schemeClr val="tx1"/>
+            <a:schemeClr val="tx1">
+              <a:lumMod val="75000"/>
+              <a:lumOff val="25000"/>
+            </a:schemeClr>
           </a:solidFill>
           <a:latin typeface="+mn-lt"/>
           <a:ea typeface="+mn-ea"/>
@@ -3000,7 +4368,7 @@
       <a:defPPr>
         <a:defRPr lang="en-US"/>
       </a:defPPr>
-      <a:lvl1pPr marL="0" algn="l" defTabSz="457200" rtl="0" eaLnBrk="1" latinLnBrk="0" hangingPunct="1">
+      <a:lvl1pPr marL="0" algn="l" defTabSz="914400" rtl="0" eaLnBrk="1" latinLnBrk="0" hangingPunct="1">
         <a:defRPr sz="1800" kern="1200">
           <a:solidFill>
             <a:schemeClr val="tx1"/>
@@ -3010,7 +4378,7 @@
           <a:cs typeface="+mn-cs"/>
         </a:defRPr>
       </a:lvl1pPr>
-      <a:lvl2pPr marL="457200" algn="l" defTabSz="457200" rtl="0" eaLnBrk="1" latinLnBrk="0" hangingPunct="1">
+      <a:lvl2pPr marL="457200" algn="l" defTabSz="914400" rtl="0" eaLnBrk="1" latinLnBrk="0" hangingPunct="1">
         <a:defRPr sz="1800" kern="1200">
           <a:solidFill>
             <a:schemeClr val="tx1"/>
@@ -3020,7 +4388,7 @@
           <a:cs typeface="+mn-cs"/>
         </a:defRPr>
       </a:lvl2pPr>
-      <a:lvl3pPr marL="914400" algn="l" defTabSz="457200" rtl="0" eaLnBrk="1" latinLnBrk="0" hangingPunct="1">
+      <a:lvl3pPr marL="914400" algn="l" defTabSz="914400" rtl="0" eaLnBrk="1" latinLnBrk="0" hangingPunct="1">
         <a:defRPr sz="1800" kern="1200">
           <a:solidFill>
             <a:schemeClr val="tx1"/>
@@ -3030,7 +4398,7 @@
           <a:cs typeface="+mn-cs"/>
         </a:defRPr>
       </a:lvl3pPr>
-      <a:lvl4pPr marL="1371600" algn="l" defTabSz="457200" rtl="0" eaLnBrk="1" latinLnBrk="0" hangingPunct="1">
+      <a:lvl4pPr marL="1371600" algn="l" defTabSz="914400" rtl="0" eaLnBrk="1" latinLnBrk="0" hangingPunct="1">
         <a:defRPr sz="1800" kern="1200">
           <a:solidFill>
             <a:schemeClr val="tx1"/>
@@ -3040,7 +4408,7 @@
           <a:cs typeface="+mn-cs"/>
         </a:defRPr>
       </a:lvl4pPr>
-      <a:lvl5pPr marL="1828800" algn="l" defTabSz="457200" rtl="0" eaLnBrk="1" latinLnBrk="0" hangingPunct="1">
+      <a:lvl5pPr marL="1828800" algn="l" defTabSz="914400" rtl="0" eaLnBrk="1" latinLnBrk="0" hangingPunct="1">
         <a:defRPr sz="1800" kern="1200">
           <a:solidFill>
             <a:schemeClr val="tx1"/>
@@ -3050,7 +4418,7 @@
           <a:cs typeface="+mn-cs"/>
         </a:defRPr>
       </a:lvl5pPr>
-      <a:lvl6pPr marL="2286000" algn="l" defTabSz="457200" rtl="0" eaLnBrk="1" latinLnBrk="0" hangingPunct="1">
+      <a:lvl6pPr marL="2286000" algn="l" defTabSz="914400" rtl="0" eaLnBrk="1" latinLnBrk="0" hangingPunct="1">
         <a:defRPr sz="1800" kern="1200">
           <a:solidFill>
             <a:schemeClr val="tx1"/>
@@ -3060,7 +4428,7 @@
           <a:cs typeface="+mn-cs"/>
         </a:defRPr>
       </a:lvl6pPr>
-      <a:lvl7pPr marL="2743200" algn="l" defTabSz="457200" rtl="0" eaLnBrk="1" latinLnBrk="0" hangingPunct="1">
+      <a:lvl7pPr marL="2743200" algn="l" defTabSz="914400" rtl="0" eaLnBrk="1" latinLnBrk="0" hangingPunct="1">
         <a:defRPr sz="1800" kern="1200">
           <a:solidFill>
             <a:schemeClr val="tx1"/>
@@ -3070,7 +4438,7 @@
           <a:cs typeface="+mn-cs"/>
         </a:defRPr>
       </a:lvl7pPr>
-      <a:lvl8pPr marL="3200400" algn="l" defTabSz="457200" rtl="0" eaLnBrk="1" latinLnBrk="0" hangingPunct="1">
+      <a:lvl8pPr marL="3200400" algn="l" defTabSz="914400" rtl="0" eaLnBrk="1" latinLnBrk="0" hangingPunct="1">
         <a:defRPr sz="1800" kern="1200">
           <a:solidFill>
             <a:schemeClr val="tx1"/>
@@ -3080,7 +4448,7 @@
           <a:cs typeface="+mn-cs"/>
         </a:defRPr>
       </a:lvl8pPr>
-      <a:lvl9pPr marL="3657600" algn="l" defTabSz="457200" rtl="0" eaLnBrk="1" latinLnBrk="0" hangingPunct="1">
+      <a:lvl9pPr marL="3657600" algn="l" defTabSz="914400" rtl="0" eaLnBrk="1" latinLnBrk="0" hangingPunct="1">
         <a:defRPr sz="1800" kern="1200">
           <a:solidFill>
             <a:schemeClr val="tx1"/>
@@ -3623,20 +4991,60 @@
           <a:bodyPr/>
           <a:lstStyle/>
           <a:p>
-            <a:endParaRPr/>
-          </a:p>
-          <a:p>
-            <a:r>
-              <a:t>AWS: S3, EBS, EFS</a:t>
-            </a:r>
-          </a:p>
-          <a:p>
-            <a:r>
+            <a:endParaRPr dirty="0"/>
+          </a:p>
+          <a:p>
+            <a:r>
+              <a:rPr dirty="0"/>
+              <a:t>AWS: S3, E</a:t>
+            </a:r>
+            <a:r>
+              <a:rPr lang="en-US" dirty="0"/>
+              <a:t>lastic Block </a:t>
+            </a:r>
+            <a:r>
+              <a:rPr dirty="0"/>
+              <a:t>S</a:t>
+            </a:r>
+            <a:r>
+              <a:rPr lang="en-US" dirty="0"/>
+              <a:t>tore</a:t>
+            </a:r>
+            <a:r>
+              <a:rPr dirty="0"/>
+              <a:t>, E</a:t>
+            </a:r>
+            <a:r>
+              <a:rPr lang="en-US" dirty="0"/>
+              <a:t>lastic </a:t>
+            </a:r>
+            <a:r>
+              <a:rPr dirty="0"/>
+              <a:t>F</a:t>
+            </a:r>
+            <a:r>
+              <a:rPr lang="en-US" dirty="0"/>
+              <a:t>ile </a:t>
+            </a:r>
+            <a:r>
+              <a:rPr dirty="0"/>
+              <a:t>S</a:t>
+            </a:r>
+            <a:r>
+              <a:rPr lang="en-US" dirty="0"/>
+              <a:t>ystem</a:t>
+            </a:r>
+            <a:endParaRPr dirty="0"/>
+          </a:p>
+          <a:p>
+            <a:r>
+              <a:rPr dirty="0"/>
               <a:t>Azure: Blob, Disk, File Storage</a:t>
             </a:r>
           </a:p>
           <a:p>
             <a:r>
+              <a:rPr dirty="0"/>
               <a:t>GCP: Cloud Storage, Persistent Disk</a:t>
             </a:r>
           </a:p>
@@ -3754,7 +5162,13 @@
       </p:grpSpPr>
       <p:sp>
         <p:nvSpPr>
-          <p:cNvPr id="2" name="Title 1"/>
+          <p:cNvPr id="2" name="Title 1">
+            <a:extLst>
+              <a:ext uri="{FF2B5EF4-FFF2-40B4-BE49-F238E27FC236}">
+                <a16:creationId xmlns:a16="http://schemas.microsoft.com/office/drawing/2014/main" id="{63331AD3-BCFD-EBD9-F8AC-AA2EC8EED35E}"/>
+              </a:ext>
+            </a:extLst>
+          </p:cNvPr>
           <p:cNvSpPr>
             <a:spLocks noGrp="1"/>
           </p:cNvSpPr>
@@ -3768,46 +5182,66 @@
           <a:lstStyle/>
           <a:p>
             <a:r>
-              <a:t>3.2.3 Database Services Overview</a:t>
-            </a:r>
-          </a:p>
-        </p:txBody>
-      </p:sp>
-      <p:sp>
-        <p:nvSpPr>
-          <p:cNvPr id="3" name="Content Placeholder 2"/>
-          <p:cNvSpPr>
-            <a:spLocks noGrp="1"/>
-          </p:cNvSpPr>
+              <a:rPr lang="en-US" dirty="0"/>
+              <a:t>Data Lake</a:t>
+            </a:r>
+          </a:p>
+        </p:txBody>
+      </p:sp>
+      <p:pic>
+        <p:nvPicPr>
+          <p:cNvPr id="1026" name="Picture 2">
+            <a:extLst>
+              <a:ext uri="{FF2B5EF4-FFF2-40B4-BE49-F238E27FC236}">
+                <a16:creationId xmlns:a16="http://schemas.microsoft.com/office/drawing/2014/main" id="{A13EDEAF-9338-E169-0635-59447D3F292F}"/>
+              </a:ext>
+            </a:extLst>
+          </p:cNvPr>
+          <p:cNvPicPr>
+            <a:picLocks noGrp="1" noChangeAspect="1" noChangeArrowheads="1"/>
+          </p:cNvPicPr>
           <p:nvPr>
             <p:ph idx="1"/>
           </p:nvPr>
-        </p:nvSpPr>
-        <p:spPr/>
-        <p:txBody>
-          <a:bodyPr/>
-          <a:lstStyle/>
-          <a:p>
-            <a:endParaRPr/>
-          </a:p>
-          <a:p>
-            <a:r>
-              <a:t>Relational and NoSQL options</a:t>
-            </a:r>
-          </a:p>
-          <a:p>
-            <a:r>
-              <a:t>Fully managed services</a:t>
-            </a:r>
-          </a:p>
-          <a:p>
-            <a:r>
-              <a:t>Automatic backups and scaling</a:t>
-            </a:r>
-          </a:p>
-        </p:txBody>
-      </p:sp>
+        </p:nvPicPr>
+        <p:blipFill>
+          <a:blip r:embed="rId3">
+            <a:extLst>
+              <a:ext uri="{28A0092B-C50C-407E-A947-70E740481C1C}">
+                <a14:useLocalDpi xmlns:a14="http://schemas.microsoft.com/office/drawing/2010/main" val="0"/>
+              </a:ext>
+            </a:extLst>
+          </a:blip>
+          <a:stretch>
+            <a:fillRect/>
+          </a:stretch>
+        </p:blipFill>
+        <p:spPr bwMode="auto">
+          <a:xfrm>
+            <a:off x="1791399" y="1846263"/>
+            <a:ext cx="5605651" cy="4022725"/>
+          </a:xfrm>
+          <a:prstGeom prst="rect">
+            <a:avLst/>
+          </a:prstGeom>
+          <a:noFill/>
+          <a:extLst>
+            <a:ext uri="{909E8E84-426E-40DD-AFC4-6F175D3DCCD1}">
+              <a14:hiddenFill xmlns:a14="http://schemas.microsoft.com/office/drawing/2010/main">
+                <a:solidFill>
+                  <a:srgbClr val="FFFFFF"/>
+                </a:solidFill>
+              </a14:hiddenFill>
+            </a:ext>
+          </a:extLst>
+        </p:spPr>
+      </p:pic>
     </p:spTree>
+    <p:extLst>
+      <p:ext uri="{BB962C8B-B14F-4D97-AF65-F5344CB8AC3E}">
+        <p14:creationId xmlns:p14="http://schemas.microsoft.com/office/powerpoint/2010/main" val="2939249733"/>
+      </p:ext>
+    </p:extLst>
   </p:cSld>
   <p:clrMapOvr>
     <a:masterClrMapping/>
@@ -3848,7 +5282,7 @@
           <a:lstStyle/>
           <a:p>
             <a:r>
-              <a:t>Database Services Comparison</a:t>
+              <a:t>3.2.3 Database Services Overview</a:t>
             </a:r>
           </a:p>
         </p:txBody>
@@ -3872,17 +5306,17 @@
           </a:p>
           <a:p>
             <a:r>
-              <a:t>AWS: RDS, DynamoDB</a:t>
-            </a:r>
-          </a:p>
-          <a:p>
-            <a:r>
-              <a:t>Azure: SQL Database, Cosmos DB</a:t>
-            </a:r>
-          </a:p>
-          <a:p>
-            <a:r>
-              <a:t>GCP: Cloud SQL, Firestore, Bigtable</a:t>
+              <a:t>Relational and NoSQL options</a:t>
+            </a:r>
+          </a:p>
+          <a:p>
+            <a:r>
+              <a:t>Fully managed services</a:t>
+            </a:r>
+          </a:p>
+          <a:p>
+            <a:r>
+              <a:t>Automatic backups and scaling</a:t>
             </a:r>
           </a:p>
         </p:txBody>
@@ -3928,7 +5362,7 @@
           <a:lstStyle/>
           <a:p>
             <a:r>
-              <a:t>Database Use Cases</a:t>
+              <a:t>Database Services Comparison</a:t>
             </a:r>
           </a:p>
         </p:txBody>
@@ -3952,22 +5386,17 @@
           </a:p>
           <a:p>
             <a:r>
-              <a:t>E-commerce systems</a:t>
-            </a:r>
-          </a:p>
-          <a:p>
-            <a:r>
-              <a:t>Financial applications</a:t>
-            </a:r>
-          </a:p>
-          <a:p>
-            <a:r>
-              <a:t>User authentication/metadata</a:t>
-            </a:r>
-          </a:p>
-          <a:p>
-            <a:r>
-              <a:t>Real-time apps</a:t>
+              <a:t>AWS: RDS, DynamoDB</a:t>
+            </a:r>
+          </a:p>
+          <a:p>
+            <a:r>
+              <a:t>Azure: SQL Database, Cosmos DB</a:t>
+            </a:r>
+          </a:p>
+          <a:p>
+            <a:r>
+              <a:t>GCP: Cloud SQL, Firestore, Bigtable</a:t>
             </a:r>
           </a:p>
         </p:txBody>
@@ -4109,7 +5538,7 @@
           <a:lstStyle/>
           <a:p>
             <a:r>
-              <a:t>Real-World Cloud Use Cases</a:t>
+              <a:t>Database Use Cases</a:t>
             </a:r>
           </a:p>
         </p:txBody>
@@ -4133,17 +5562,22 @@
           </a:p>
           <a:p>
             <a:r>
-              <a:t>E-commerce websites hosted on AWS</a:t>
-            </a:r>
-          </a:p>
-          <a:p>
-            <a:r>
-              <a:t>Universities using Azure for LMS</a:t>
-            </a:r>
-          </a:p>
-          <a:p>
-            <a:r>
-              <a:t>BigQuery used for large-scale analytics</a:t>
+              <a:t>E-commerce systems</a:t>
+            </a:r>
+          </a:p>
+          <a:p>
+            <a:r>
+              <a:t>Financial applications</a:t>
+            </a:r>
+          </a:p>
+          <a:p>
+            <a:r>
+              <a:t>User authentication/metadata</a:t>
+            </a:r>
+          </a:p>
+          <a:p>
+            <a:r>
+              <a:t>Real-time apps</a:t>
             </a:r>
           </a:p>
         </p:txBody>
@@ -4189,7 +5623,7 @@
           <a:lstStyle/>
           <a:p>
             <a:r>
-              <a:t>Industry Examples</a:t>
+              <a:t>Real-World Cloud Use Cases</a:t>
             </a:r>
           </a:p>
         </p:txBody>
@@ -4213,17 +5647,17 @@
           </a:p>
           <a:p>
             <a:r>
-              <a:t>Netflix uses AWS for streaming</a:t>
-            </a:r>
-          </a:p>
-          <a:p>
-            <a:r>
-              <a:t>LinkedIn uses Azure for enterprise services</a:t>
-            </a:r>
-          </a:p>
-          <a:p>
-            <a:r>
-              <a:t>Spotify uses GCP for data analytics</a:t>
+              <a:t>E-commerce websites hosted on AWS</a:t>
+            </a:r>
+          </a:p>
+          <a:p>
+            <a:r>
+              <a:t>Universities using Azure for LMS</a:t>
+            </a:r>
+          </a:p>
+          <a:p>
+            <a:r>
+              <a:t>BigQuery used for large-scale analytics</a:t>
             </a:r>
           </a:p>
         </p:txBody>
@@ -4269,7 +5703,7 @@
           <a:lstStyle/>
           <a:p>
             <a:r>
-              <a:t>Summary</a:t>
+              <a:t>Industry Examples</a:t>
             </a:r>
           </a:p>
         </p:txBody>
@@ -4293,17 +5727,17 @@
           </a:p>
           <a:p>
             <a:r>
-              <a:t>AWS, Azure, GCP dominate cloud market</a:t>
-            </a:r>
-          </a:p>
-          <a:p>
-            <a:r>
-              <a:t>Compute, Storage, Database = core services</a:t>
-            </a:r>
-          </a:p>
-          <a:p>
-            <a:r>
-              <a:t>Cloud skills essential for IT careers</a:t>
+              <a:t>Netflix uses AWS for streaming</a:t>
+            </a:r>
+          </a:p>
+          <a:p>
+            <a:r>
+              <a:t>LinkedIn uses Azure for enterprise services</a:t>
+            </a:r>
+          </a:p>
+          <a:p>
+            <a:r>
+              <a:t>Spotify uses GCP for data analytics</a:t>
             </a:r>
           </a:p>
         </p:txBody>
@@ -4349,7 +5783,7 @@
           <a:lstStyle/>
           <a:p>
             <a:r>
-              <a:t>Next Class</a:t>
+              <a:t>Summary</a:t>
             </a:r>
           </a:p>
         </p:txBody>
@@ -4369,21 +5803,23 @@
           <a:bodyPr/>
           <a:lstStyle/>
           <a:p>
-            <a:endParaRPr/>
-          </a:p>
-          <a:p>
-            <a:r>
-              <a:t>Hands-on demo</a:t>
-            </a:r>
-          </a:p>
-          <a:p>
-            <a:r>
-              <a:t>AWS free-tier setup</a:t>
-            </a:r>
-          </a:p>
-          <a:p>
-            <a:r>
-              <a:t>Basic EC2 + S3 walkthrough</a:t>
+            <a:endParaRPr dirty="0"/>
+          </a:p>
+          <a:p>
+            <a:r>
+              <a:rPr dirty="0"/>
+              <a:t>AWS, Azure, GCP dominate cloud market</a:t>
+            </a:r>
+          </a:p>
+          <a:p>
+            <a:r>
+              <a:rPr dirty="0"/>
+              <a:t>Compute, Storage, Database = core services</a:t>
+            </a:r>
+          </a:p>
+          <a:p>
+            <a:r>
+              <a:t>Cloud skills essential for IT careers</a:t>
             </a:r>
           </a:p>
         </p:txBody>
@@ -4977,49 +6413,49 @@
 </file>
 
 <file path=ppt/theme/theme1.xml><?xml version="1.0" encoding="utf-8"?>
-<a:theme xmlns:a="http://schemas.openxmlformats.org/drawingml/2006/main" name="Office Theme">
+<a:theme xmlns:a="http://schemas.openxmlformats.org/drawingml/2006/main" name="Retrospect">
   <a:themeElements>
-    <a:clrScheme name="Office">
+    <a:clrScheme name="Retrospect">
       <a:dk1>
-        <a:sysClr val="windowText" lastClr="000000"/>
+        <a:srgbClr val="000000"/>
       </a:dk1>
       <a:lt1>
         <a:sysClr val="window" lastClr="FFFFFF"/>
       </a:lt1>
       <a:dk2>
-        <a:srgbClr val="1F497D"/>
+        <a:srgbClr val="637052"/>
       </a:dk2>
       <a:lt2>
-        <a:srgbClr val="EEECE1"/>
+        <a:srgbClr val="CCDDEA"/>
       </a:lt2>
       <a:accent1>
-        <a:srgbClr val="4F81BD"/>
+        <a:srgbClr val="E48312"/>
       </a:accent1>
       <a:accent2>
-        <a:srgbClr val="C0504D"/>
+        <a:srgbClr val="BD582C"/>
       </a:accent2>
       <a:accent3>
-        <a:srgbClr val="9BBB59"/>
+        <a:srgbClr val="865640"/>
       </a:accent3>
       <a:accent4>
-        <a:srgbClr val="8064A2"/>
+        <a:srgbClr val="9B8357"/>
       </a:accent4>
       <a:accent5>
-        <a:srgbClr val="4BACC6"/>
+        <a:srgbClr val="C2BC80"/>
       </a:accent5>
       <a:accent6>
-        <a:srgbClr val="F79646"/>
+        <a:srgbClr val="94A088"/>
       </a:accent6>
       <a:hlink>
-        <a:srgbClr val="0000FF"/>
+        <a:srgbClr val="2998E3"/>
       </a:hlink>
       <a:folHlink>
-        <a:srgbClr val="800080"/>
+        <a:srgbClr val="8C8C8C"/>
       </a:folHlink>
     </a:clrScheme>
-    <a:fontScheme name="Office">
+    <a:fontScheme name="Retrospect">
       <a:majorFont>
-        <a:latin typeface="Calibri"/>
+        <a:latin typeface="Calibri Light" panose="020F0302020204030204"/>
         <a:ea typeface=""/>
         <a:cs typeface=""/>
         <a:font script="Jpan" typeface="ＭＳ Ｐゴシック"/>
@@ -5054,7 +6490,7 @@
         <a:font script="Geor" typeface="Sylfaen"/>
       </a:majorFont>
       <a:minorFont>
-        <a:latin typeface="Calibri"/>
+        <a:latin typeface="Calibri" panose="020F0502020204030204"/>
         <a:ea typeface=""/>
         <a:cs typeface=""/>
         <a:font script="Jpan" typeface="ＭＳ Ｐゴシック"/>
@@ -5089,6 +6525,323 @@
         <a:font script="Geor" typeface="Sylfaen"/>
       </a:minorFont>
     </a:fontScheme>
+    <a:fmtScheme name="Retrospect">
+      <a:fillStyleLst>
+        <a:solidFill>
+          <a:schemeClr val="phClr"/>
+        </a:solidFill>
+        <a:gradFill rotWithShape="1">
+          <a:gsLst>
+            <a:gs pos="0">
+              <a:schemeClr val="phClr">
+                <a:tint val="65000"/>
+                <a:shade val="92000"/>
+                <a:satMod val="130000"/>
+              </a:schemeClr>
+            </a:gs>
+            <a:gs pos="45000">
+              <a:schemeClr val="phClr">
+                <a:tint val="60000"/>
+                <a:shade val="99000"/>
+                <a:satMod val="120000"/>
+              </a:schemeClr>
+            </a:gs>
+            <a:gs pos="100000">
+              <a:schemeClr val="phClr">
+                <a:tint val="55000"/>
+                <a:satMod val="140000"/>
+              </a:schemeClr>
+            </a:gs>
+          </a:gsLst>
+          <a:path path="circle">
+            <a:fillToRect l="100000" t="100000" r="100000" b="100000"/>
+          </a:path>
+        </a:gradFill>
+        <a:gradFill rotWithShape="1">
+          <a:gsLst>
+            <a:gs pos="0">
+              <a:schemeClr val="phClr">
+                <a:shade val="85000"/>
+                <a:satMod val="130000"/>
+              </a:schemeClr>
+            </a:gs>
+            <a:gs pos="34000">
+              <a:schemeClr val="phClr">
+                <a:shade val="87000"/>
+                <a:satMod val="125000"/>
+              </a:schemeClr>
+            </a:gs>
+            <a:gs pos="70000">
+              <a:schemeClr val="phClr">
+                <a:tint val="100000"/>
+                <a:shade val="90000"/>
+                <a:satMod val="130000"/>
+              </a:schemeClr>
+            </a:gs>
+            <a:gs pos="100000">
+              <a:schemeClr val="phClr">
+                <a:tint val="100000"/>
+                <a:shade val="100000"/>
+                <a:satMod val="110000"/>
+              </a:schemeClr>
+            </a:gs>
+          </a:gsLst>
+          <a:path path="circle">
+            <a:fillToRect l="100000" t="100000" r="100000" b="100000"/>
+          </a:path>
+        </a:gradFill>
+      </a:fillStyleLst>
+      <a:lnStyleLst>
+        <a:ln w="12700" cap="flat" cmpd="sng" algn="ctr">
+          <a:solidFill>
+            <a:schemeClr val="phClr"/>
+          </a:solidFill>
+          <a:prstDash val="solid"/>
+        </a:ln>
+        <a:ln w="15875" cap="flat" cmpd="sng" algn="ctr">
+          <a:solidFill>
+            <a:schemeClr val="phClr"/>
+          </a:solidFill>
+          <a:prstDash val="solid"/>
+        </a:ln>
+        <a:ln w="25400" cap="flat" cmpd="sng" algn="ctr">
+          <a:solidFill>
+            <a:schemeClr val="phClr"/>
+          </a:solidFill>
+          <a:prstDash val="solid"/>
+        </a:ln>
+      </a:lnStyleLst>
+      <a:effectStyleLst>
+        <a:effectStyle>
+          <a:effectLst/>
+        </a:effectStyle>
+        <a:effectStyle>
+          <a:effectLst>
+            <a:outerShdw blurRad="38100" dist="25400" dir="2700000" algn="br" rotWithShape="0">
+              <a:srgbClr val="000000">
+                <a:alpha val="60000"/>
+              </a:srgbClr>
+            </a:outerShdw>
+          </a:effectLst>
+        </a:effectStyle>
+        <a:effectStyle>
+          <a:effectLst>
+            <a:outerShdw blurRad="44450" dist="25400" dir="2700000" algn="br" rotWithShape="0">
+              <a:srgbClr val="000000">
+                <a:alpha val="60000"/>
+              </a:srgbClr>
+            </a:outerShdw>
+          </a:effectLst>
+          <a:scene3d>
+            <a:camera prst="orthographicFront">
+              <a:rot lat="0" lon="0" rev="0"/>
+            </a:camera>
+            <a:lightRig rig="threePt" dir="t">
+              <a:rot lat="0" lon="0" rev="19800000"/>
+            </a:lightRig>
+          </a:scene3d>
+          <a:sp3d prstMaterial="flat">
+            <a:bevelT w="25400" h="31750"/>
+          </a:sp3d>
+        </a:effectStyle>
+      </a:effectStyleLst>
+      <a:bgFillStyleLst>
+        <a:solidFill>
+          <a:schemeClr val="phClr"/>
+        </a:solidFill>
+        <a:solidFill>
+          <a:schemeClr val="phClr">
+            <a:tint val="90000"/>
+            <a:shade val="97000"/>
+            <a:satMod val="130000"/>
+          </a:schemeClr>
+        </a:solidFill>
+        <a:gradFill rotWithShape="1">
+          <a:gsLst>
+            <a:gs pos="0">
+              <a:schemeClr val="phClr">
+                <a:tint val="96000"/>
+                <a:shade val="99000"/>
+                <a:satMod val="140000"/>
+              </a:schemeClr>
+            </a:gs>
+            <a:gs pos="65000">
+              <a:schemeClr val="phClr">
+                <a:tint val="100000"/>
+                <a:shade val="80000"/>
+                <a:satMod val="130000"/>
+              </a:schemeClr>
+            </a:gs>
+            <a:gs pos="100000">
+              <a:schemeClr val="phClr">
+                <a:tint val="100000"/>
+                <a:shade val="48000"/>
+                <a:satMod val="120000"/>
+              </a:schemeClr>
+            </a:gs>
+          </a:gsLst>
+          <a:lin ang="16200000" scaled="0"/>
+        </a:gradFill>
+      </a:bgFillStyleLst>
+    </a:fmtScheme>
+  </a:themeElements>
+  <a:objectDefaults/>
+  <a:extraClrSchemeLst/>
+  <a:extLst>
+    <a:ext uri="{05A4C25C-085E-4340-85A3-A5531E510DB2}">
+      <thm15:themeFamily xmlns:thm15="http://schemas.microsoft.com/office/thememl/2012/main" name="Retrospect" id="{5F128B03-DCCA-4EEB-AB3B-CF2899314A46}" vid="{3F1AAB62-24C6-49D2-8E01-B56FAC9A3DCD}"/>
+    </a:ext>
+  </a:extLst>
+</a:theme>
+</file>
+
+<file path=ppt/theme/theme2.xml><?xml version="1.0" encoding="utf-8"?>
+<a:theme xmlns:a="http://schemas.openxmlformats.org/drawingml/2006/main" name="Office Theme">
+  <a:themeElements>
+    <a:clrScheme name="Office">
+      <a:dk1>
+        <a:sysClr val="windowText" lastClr="000000"/>
+      </a:dk1>
+      <a:lt1>
+        <a:sysClr val="window" lastClr="FFFFFF"/>
+      </a:lt1>
+      <a:dk2>
+        <a:srgbClr val="44546A"/>
+      </a:dk2>
+      <a:lt2>
+        <a:srgbClr val="E7E6E6"/>
+      </a:lt2>
+      <a:accent1>
+        <a:srgbClr val="4472C4"/>
+      </a:accent1>
+      <a:accent2>
+        <a:srgbClr val="ED7D31"/>
+      </a:accent2>
+      <a:accent3>
+        <a:srgbClr val="A5A5A5"/>
+      </a:accent3>
+      <a:accent4>
+        <a:srgbClr val="FFC000"/>
+      </a:accent4>
+      <a:accent5>
+        <a:srgbClr val="5B9BD5"/>
+      </a:accent5>
+      <a:accent6>
+        <a:srgbClr val="70AD47"/>
+      </a:accent6>
+      <a:hlink>
+        <a:srgbClr val="0563C1"/>
+      </a:hlink>
+      <a:folHlink>
+        <a:srgbClr val="954F72"/>
+      </a:folHlink>
+    </a:clrScheme>
+    <a:fontScheme name="Office">
+      <a:majorFont>
+        <a:latin typeface="Calibri Light" panose="020F0302020204030204"/>
+        <a:ea typeface=""/>
+        <a:cs typeface=""/>
+        <a:font script="Jpan" typeface="游ゴシック Light"/>
+        <a:font script="Hang" typeface="맑은 고딕"/>
+        <a:font script="Hans" typeface="等线 Light"/>
+        <a:font script="Hant" typeface="新細明體"/>
+        <a:font script="Arab" typeface="Times New Roman"/>
+        <a:font script="Hebr" typeface="Times New Roman"/>
+        <a:font script="Thai" typeface="Angsana New"/>
+        <a:font script="Ethi" typeface="Nyala"/>
+        <a:font script="Beng" typeface="Vrinda"/>
+        <a:font script="Gujr" typeface="Shruti"/>
+        <a:font script="Khmr" typeface="MoolBoran"/>
+        <a:font script="Knda" typeface="Tunga"/>
+        <a:font script="Guru" typeface="Raavi"/>
+        <a:font script="Cans" typeface="Euphemia"/>
+        <a:font script="Cher" typeface="Plantagenet Cherokee"/>
+        <a:font script="Yiii" typeface="Microsoft Yi Baiti"/>
+        <a:font script="Tibt" typeface="Microsoft Himalaya"/>
+        <a:font script="Thaa" typeface="MV Boli"/>
+        <a:font script="Deva" typeface="Mangal"/>
+        <a:font script="Telu" typeface="Gautami"/>
+        <a:font script="Taml" typeface="Latha"/>
+        <a:font script="Syrc" typeface="Estrangelo Edessa"/>
+        <a:font script="Orya" typeface="Kalinga"/>
+        <a:font script="Mlym" typeface="Kartika"/>
+        <a:font script="Laoo" typeface="DokChampa"/>
+        <a:font script="Sinh" typeface="Iskoola Pota"/>
+        <a:font script="Mong" typeface="Mongolian Baiti"/>
+        <a:font script="Viet" typeface="Times New Roman"/>
+        <a:font script="Uigh" typeface="Microsoft Uighur"/>
+        <a:font script="Geor" typeface="Sylfaen"/>
+        <a:font script="Armn" typeface="Arial"/>
+        <a:font script="Bugi" typeface="Leelawadee UI"/>
+        <a:font script="Bopo" typeface="Microsoft JhengHei"/>
+        <a:font script="Java" typeface="Javanese Text"/>
+        <a:font script="Lisu" typeface="Segoe UI"/>
+        <a:font script="Mymr" typeface="Myanmar Text"/>
+        <a:font script="Nkoo" typeface="Ebrima"/>
+        <a:font script="Olck" typeface="Nirmala UI"/>
+        <a:font script="Osma" typeface="Ebrima"/>
+        <a:font script="Phag" typeface="Phagspa"/>
+        <a:font script="Syrn" typeface="Estrangelo Edessa"/>
+        <a:font script="Syrj" typeface="Estrangelo Edessa"/>
+        <a:font script="Syre" typeface="Estrangelo Edessa"/>
+        <a:font script="Sora" typeface="Nirmala UI"/>
+        <a:font script="Tale" typeface="Microsoft Tai Le"/>
+        <a:font script="Talu" typeface="Microsoft New Tai Lue"/>
+        <a:font script="Tfng" typeface="Ebrima"/>
+      </a:majorFont>
+      <a:minorFont>
+        <a:latin typeface="Calibri" panose="020F0502020204030204"/>
+        <a:ea typeface=""/>
+        <a:cs typeface=""/>
+        <a:font script="Jpan" typeface="游ゴシック"/>
+        <a:font script="Hang" typeface="맑은 고딕"/>
+        <a:font script="Hans" typeface="等线"/>
+        <a:font script="Hant" typeface="新細明體"/>
+        <a:font script="Arab" typeface="Arial"/>
+        <a:font script="Hebr" typeface="Arial"/>
+        <a:font script="Thai" typeface="Cordia New"/>
+        <a:font script="Ethi" typeface="Nyala"/>
+        <a:font script="Beng" typeface="Vrinda"/>
+        <a:font script="Gujr" typeface="Shruti"/>
+        <a:font script="Khmr" typeface="DaunPenh"/>
+        <a:font script="Knda" typeface="Tunga"/>
+        <a:font script="Guru" typeface="Raavi"/>
+        <a:font script="Cans" typeface="Euphemia"/>
+        <a:font script="Cher" typeface="Plantagenet Cherokee"/>
+        <a:font script="Yiii" typeface="Microsoft Yi Baiti"/>
+        <a:font script="Tibt" typeface="Microsoft Himalaya"/>
+        <a:font script="Thaa" typeface="MV Boli"/>
+        <a:font script="Deva" typeface="Mangal"/>
+        <a:font script="Telu" typeface="Gautami"/>
+        <a:font script="Taml" typeface="Latha"/>
+        <a:font script="Syrc" typeface="Estrangelo Edessa"/>
+        <a:font script="Orya" typeface="Kalinga"/>
+        <a:font script="Mlym" typeface="Kartika"/>
+        <a:font script="Laoo" typeface="DokChampa"/>
+        <a:font script="Sinh" typeface="Iskoola Pota"/>
+        <a:font script="Mong" typeface="Mongolian Baiti"/>
+        <a:font script="Viet" typeface="Arial"/>
+        <a:font script="Uigh" typeface="Microsoft Uighur"/>
+        <a:font script="Geor" typeface="Sylfaen"/>
+        <a:font script="Armn" typeface="Arial"/>
+        <a:font script="Bugi" typeface="Leelawadee UI"/>
+        <a:font script="Bopo" typeface="Microsoft JhengHei"/>
+        <a:font script="Java" typeface="Javanese Text"/>
+        <a:font script="Lisu" typeface="Segoe UI"/>
+        <a:font script="Mymr" typeface="Myanmar Text"/>
+        <a:font script="Nkoo" typeface="Ebrima"/>
+        <a:font script="Olck" typeface="Nirmala UI"/>
+        <a:font script="Osma" typeface="Ebrima"/>
+        <a:font script="Phag" typeface="Phagspa"/>
+        <a:font script="Syrn" typeface="Estrangelo Edessa"/>
+        <a:font script="Syrj" typeface="Estrangelo Edessa"/>
+        <a:font script="Syre" typeface="Estrangelo Edessa"/>
+        <a:font script="Sora" typeface="Nirmala UI"/>
+        <a:font script="Tale" typeface="Microsoft Tai Le"/>
+        <a:font script="Talu" typeface="Microsoft New Tai Lue"/>
+        <a:font script="Tfng" typeface="Ebrima"/>
+      </a:minorFont>
+    </a:fontScheme>
     <a:fmtScheme name="Office">
       <a:fillStyleLst>
         <a:solidFill>
@@ -5098,200 +6851,141 @@
           <a:gsLst>
             <a:gs pos="0">
               <a:schemeClr val="phClr">
-                <a:tint val="50000"/>
-                <a:satMod val="300000"/>
+                <a:lumMod val="110000"/>
+                <a:satMod val="105000"/>
+                <a:tint val="67000"/>
               </a:schemeClr>
             </a:gs>
-            <a:gs pos="35000">
+            <a:gs pos="50000">
               <a:schemeClr val="phClr">
-                <a:tint val="37000"/>
-                <a:satMod val="300000"/>
+                <a:lumMod val="105000"/>
+                <a:satMod val="103000"/>
+                <a:tint val="73000"/>
               </a:schemeClr>
             </a:gs>
             <a:gs pos="100000">
               <a:schemeClr val="phClr">
-                <a:tint val="15000"/>
-                <a:satMod val="350000"/>
+                <a:lumMod val="105000"/>
+                <a:satMod val="109000"/>
+                <a:tint val="81000"/>
               </a:schemeClr>
             </a:gs>
           </a:gsLst>
-          <a:lin ang="16200000" scaled="1"/>
+          <a:lin ang="5400000" scaled="0"/>
         </a:gradFill>
         <a:gradFill rotWithShape="1">
           <a:gsLst>
             <a:gs pos="0">
               <a:schemeClr val="phClr">
-                <a:tint val="100000"/>
+                <a:satMod val="103000"/>
+                <a:lumMod val="102000"/>
+                <a:tint val="94000"/>
+              </a:schemeClr>
+            </a:gs>
+            <a:gs pos="50000">
+              <a:schemeClr val="phClr">
+                <a:satMod val="110000"/>
+                <a:lumMod val="100000"/>
                 <a:shade val="100000"/>
-                <a:satMod val="130000"/>
               </a:schemeClr>
             </a:gs>
             <a:gs pos="100000">
               <a:schemeClr val="phClr">
-                <a:tint val="50000"/>
-                <a:shade val="100000"/>
-                <a:satMod val="350000"/>
+                <a:lumMod val="99000"/>
+                <a:satMod val="120000"/>
+                <a:shade val="78000"/>
               </a:schemeClr>
             </a:gs>
           </a:gsLst>
-          <a:lin ang="16200000" scaled="0"/>
+          <a:lin ang="5400000" scaled="0"/>
         </a:gradFill>
       </a:fillStyleLst>
       <a:lnStyleLst>
-        <a:ln w="9525" cap="flat" cmpd="sng" algn="ctr">
-          <a:solidFill>
-            <a:schemeClr val="phClr">
-              <a:shade val="95000"/>
-              <a:satMod val="105000"/>
-            </a:schemeClr>
-          </a:solidFill>
-          <a:prstDash val="solid"/>
-        </a:ln>
-        <a:ln w="25400" cap="flat" cmpd="sng" algn="ctr">
+        <a:ln w="6350" cap="flat" cmpd="sng" algn="ctr">
           <a:solidFill>
             <a:schemeClr val="phClr"/>
           </a:solidFill>
           <a:prstDash val="solid"/>
+          <a:miter lim="800000"/>
         </a:ln>
-        <a:ln w="38100" cap="flat" cmpd="sng" algn="ctr">
+        <a:ln w="12700" cap="flat" cmpd="sng" algn="ctr">
           <a:solidFill>
             <a:schemeClr val="phClr"/>
           </a:solidFill>
           <a:prstDash val="solid"/>
+          <a:miter lim="800000"/>
+        </a:ln>
+        <a:ln w="19050" cap="flat" cmpd="sng" algn="ctr">
+          <a:solidFill>
+            <a:schemeClr val="phClr"/>
+          </a:solidFill>
+          <a:prstDash val="solid"/>
+          <a:miter lim="800000"/>
         </a:ln>
       </a:lnStyleLst>
       <a:effectStyleLst>
         <a:effectStyle>
+          <a:effectLst/>
+        </a:effectStyle>
+        <a:effectStyle>
+          <a:effectLst/>
+        </a:effectStyle>
+        <a:effectStyle>
           <a:effectLst>
-            <a:outerShdw blurRad="40000" dist="20000" dir="5400000" rotWithShape="0">
+            <a:outerShdw blurRad="57150" dist="19050" dir="5400000" algn="ctr" rotWithShape="0">
               <a:srgbClr val="000000">
-                <a:alpha val="38000"/>
+                <a:alpha val="63000"/>
               </a:srgbClr>
             </a:outerShdw>
           </a:effectLst>
-        </a:effectStyle>
-        <a:effectStyle>
-          <a:effectLst>
-            <a:outerShdw blurRad="40000" dist="23000" dir="5400000" rotWithShape="0">
-              <a:srgbClr val="000000">
-                <a:alpha val="35000"/>
-              </a:srgbClr>
-            </a:outerShdw>
-          </a:effectLst>
-        </a:effectStyle>
-        <a:effectStyle>
-          <a:effectLst>
-            <a:outerShdw blurRad="40000" dist="23000" dir="5400000" rotWithShape="0">
-              <a:srgbClr val="000000">
-                <a:alpha val="35000"/>
-              </a:srgbClr>
-            </a:outerShdw>
-          </a:effectLst>
-          <a:scene3d>
-            <a:camera prst="orthographicFront">
-              <a:rot lat="0" lon="0" rev="0"/>
-            </a:camera>
-            <a:lightRig rig="threePt" dir="t">
-              <a:rot lat="0" lon="0" rev="1200000"/>
-            </a:lightRig>
-          </a:scene3d>
-          <a:sp3d>
-            <a:bevelT w="63500" h="25400"/>
-          </a:sp3d>
         </a:effectStyle>
       </a:effectStyleLst>
       <a:bgFillStyleLst>
         <a:solidFill>
           <a:schemeClr val="phClr"/>
         </a:solidFill>
+        <a:solidFill>
+          <a:schemeClr val="phClr">
+            <a:tint val="95000"/>
+            <a:satMod val="170000"/>
+          </a:schemeClr>
+        </a:solidFill>
         <a:gradFill rotWithShape="1">
           <a:gsLst>
             <a:gs pos="0">
               <a:schemeClr val="phClr">
-                <a:tint val="40000"/>
-                <a:satMod val="350000"/>
+                <a:tint val="93000"/>
+                <a:satMod val="150000"/>
+                <a:shade val="98000"/>
+                <a:lumMod val="102000"/>
               </a:schemeClr>
             </a:gs>
-            <a:gs pos="40000">
+            <a:gs pos="50000">
               <a:schemeClr val="phClr">
-                <a:tint val="45000"/>
-                <a:shade val="99000"/>
-                <a:satMod val="350000"/>
+                <a:tint val="98000"/>
+                <a:satMod val="130000"/>
+                <a:shade val="90000"/>
+                <a:lumMod val="103000"/>
               </a:schemeClr>
             </a:gs>
             <a:gs pos="100000">
               <a:schemeClr val="phClr">
-                <a:shade val="20000"/>
-                <a:satMod val="255000"/>
+                <a:shade val="63000"/>
+                <a:satMod val="120000"/>
               </a:schemeClr>
             </a:gs>
           </a:gsLst>
-          <a:path path="circle">
-            <a:fillToRect l="50000" t="-80000" r="50000" b="180000"/>
-          </a:path>
-        </a:gradFill>
-        <a:gradFill rotWithShape="1">
-          <a:gsLst>
-            <a:gs pos="0">
-              <a:schemeClr val="phClr">
-                <a:tint val="80000"/>
-                <a:satMod val="300000"/>
-              </a:schemeClr>
-            </a:gs>
-            <a:gs pos="100000">
-              <a:schemeClr val="phClr">
-                <a:shade val="30000"/>
-                <a:satMod val="200000"/>
-              </a:schemeClr>
-            </a:gs>
-          </a:gsLst>
-          <a:path path="circle">
-            <a:fillToRect l="50000" t="50000" r="50000" b="50000"/>
-          </a:path>
+          <a:lin ang="5400000" scaled="0"/>
         </a:gradFill>
       </a:bgFillStyleLst>
     </a:fmtScheme>
   </a:themeElements>
-  <a:objectDefaults>
-    <a:spDef>
-      <a:spPr/>
-      <a:bodyPr/>
-      <a:lstStyle/>
-      <a:style>
-        <a:lnRef idx="1">
-          <a:schemeClr val="accent1"/>
-        </a:lnRef>
-        <a:fillRef idx="3">
-          <a:schemeClr val="accent1"/>
-        </a:fillRef>
-        <a:effectRef idx="2">
-          <a:schemeClr val="accent1"/>
-        </a:effectRef>
-        <a:fontRef idx="minor">
-          <a:schemeClr val="lt1"/>
-        </a:fontRef>
-      </a:style>
-    </a:spDef>
-    <a:lnDef>
-      <a:spPr/>
-      <a:bodyPr/>
-      <a:lstStyle/>
-      <a:style>
-        <a:lnRef idx="2">
-          <a:schemeClr val="accent1"/>
-        </a:lnRef>
-        <a:fillRef idx="0">
-          <a:schemeClr val="accent1"/>
-        </a:fillRef>
-        <a:effectRef idx="1">
-          <a:schemeClr val="accent1"/>
-        </a:effectRef>
-        <a:fontRef idx="minor">
-          <a:schemeClr val="tx1"/>
-        </a:fontRef>
-      </a:style>
-    </a:lnDef>
-  </a:objectDefaults>
+  <a:objectDefaults/>
   <a:extraClrSchemeLst/>
+  <a:extLst>
+    <a:ext uri="{05A4C25C-085E-4340-85A3-A5531E510DB2}">
+      <thm15:themeFamily xmlns:thm15="http://schemas.microsoft.com/office/thememl/2012/main" name="Office Theme" id="{62F939B6-93AF-4DB8-9C6B-D6C7DFDC589F}" vid="{4A3C46E8-61CC-4603-A589-7422A47A8E4A}"/>
+    </a:ext>
+  </a:extLst>
 </a:theme>
 </file>